--- a/11а клас/ООП/07. Елементи от функционалното програмиране/07.4. Делегати. Функционално програмиране.pptx
+++ b/11а клас/ООП/07. Елементи от функционалното програмиране/07.4. Делегати. Функционално програмиране.pptx
@@ -9,11 +9,14 @@
   </p:notesMasterIdLst>
   <p:sldIdLst>
     <p:sldId id="258" r:id="rId2"/>
+    <p:sldId id="573" r:id="rId29"/>
     <p:sldId id="503" r:id="rId3"/>
     <p:sldId id="487" r:id="rId4"/>
+    <p:sldId id="574" r:id="rId30"/>
     <p:sldId id="488" r:id="rId5"/>
     <p:sldId id="489" r:id="rId6"/>
     <p:sldId id="507" r:id="rId7"/>
+    <p:sldId id="575" r:id="rId31"/>
     <p:sldId id="490" r:id="rId8"/>
     <p:sldId id="491" r:id="rId9"/>
     <p:sldId id="492" r:id="rId10"/>
@@ -21,6 +24,9 @@
     <p:sldId id="494" r:id="rId12"/>
     <p:sldId id="495" r:id="rId13"/>
     <p:sldId id="496" r:id="rId14"/>
+    <p:sldId id="576" r:id="rId32"/>
+    <p:sldId id="577" r:id="rId33"/>
+    <p:sldId id="578" r:id="rId34"/>
     <p:sldId id="497" r:id="rId15"/>
     <p:sldId id="498" r:id="rId16"/>
     <p:sldId id="499" r:id="rId17"/>
@@ -595,7 +601,14 @@
           <a:bodyPr/>
           <a:lstStyle/>
           <a:p>
-            <a:endParaRPr lang="bg-BG"/>
+            <a:r>
+              <a:t>Прегледайте темите. Кажете на учениците: след този урок ще могат да пишат методи, чието поведение се задава отвън.</a:t>
+            </a:r>
+          </a:p>
+          <a:p>
+            <a:r>
+              <a:t>Аналогия: като plug-in — методът е рамката, а Func/Action е плъгинът.</a:t>
+            </a:r>
           </a:p>
         </p:txBody>
       </p:sp>
@@ -680,6 +693,831 @@
         <p14:creationId xmlns:p14="http://schemas.microsoft.com/office/powerpoint/2010/main" val="3140230704"/>
       </p:ext>
     </p:extLst>
+  </p:cSld>
+  <p:clrMapOvr>
+    <a:masterClrMapping/>
+  </p:clrMapOvr>
+</p:notes>
+</file>
+
+<file path=ppt/notesSlides/notesSlide10.xml><?xml version="1.0" encoding="utf-8"?>
+<p:notes xmlns:a="http://schemas.openxmlformats.org/drawingml/2006/main" xmlns:p="http://schemas.openxmlformats.org/presentationml/2006/main" xmlns:r="http://schemas.openxmlformats.org/officeDocument/2006/relationships">
+  <p:cSld>
+    <p:spTree>
+      <p:nvGrpSpPr>
+        <p:cNvPr id="1" name=""/>
+        <p:cNvGrpSpPr/>
+        <p:nvPr/>
+      </p:nvGrpSpPr>
+      <p:grpSpPr>
+        <a:xfrm>
+          <a:off x="0" y="0"/>
+          <a:ext cx="0" cy="0"/>
+          <a:chOff x="0" y="0"/>
+          <a:chExt cx="0" cy="0"/>
+        </a:xfrm>
+      </p:grpSpPr>
+      <p:sp>
+        <p:nvSpPr>
+          <p:cNvPr id="2" name="Slide Image Placeholder 1"/>
+          <p:cNvSpPr>
+            <a:spLocks noGrp="1"/>
+          </p:cNvSpPr>
+          <p:nvPr>
+            <p:ph type="sldImg" idx="2"/>
+          </p:nvPr>
+        </p:nvSpPr>
+        <p:spPr/>
+      </p:sp>
+      <p:sp>
+        <p:nvSpPr>
+          <p:cNvPr id="3" name="Notes Placeholder 2"/>
+          <p:cNvSpPr>
+            <a:spLocks noGrp="1"/>
+          </p:cNvSpPr>
+          <p:nvPr>
+            <p:ph type="body" idx="3" sz="quarter"/>
+          </p:nvPr>
+        </p:nvSpPr>
+        <p:spPr/>
+        <p:txBody>
+          <a:bodyPr/>
+          <a:lstStyle/>
+          <a:p>
+            <a:r>
+              <a:t>Подчертайте стъпките: Split → Where(checker) → ToList → ForEach.</a:t>
+            </a:r>
+          </a:p>
+          <a:p>
+            <a:r>
+              <a:t>checker е Func&lt;string, bool&gt; — предикат. Може да се замени с Where(n =&gt; char.IsUpper(n[0])) за по-четимо решение.</a:t>
+            </a:r>
+          </a:p>
+        </p:txBody>
+      </p:sp>
+      <p:sp>
+        <p:nvSpPr>
+          <p:cNvPr id="4" name="Slide Number Placeholder 3"/>
+          <p:cNvSpPr>
+            <a:spLocks noGrp="1"/>
+          </p:cNvSpPr>
+          <p:nvPr>
+            <p:ph type="sldNum" idx="5" sz="quarter"/>
+          </p:nvPr>
+        </p:nvSpPr>
+        <p:spPr/>
+      </p:sp>
+    </p:spTree>
+  </p:cSld>
+  <p:clrMapOvr>
+    <a:masterClrMapping/>
+  </p:clrMapOvr>
+</p:notes>
+</file>
+
+<file path=ppt/notesSlides/notesSlide11.xml><?xml version="1.0" encoding="utf-8"?>
+<p:notes xmlns:a="http://schemas.openxmlformats.org/drawingml/2006/main" xmlns:p="http://schemas.openxmlformats.org/presentationml/2006/main" xmlns:r="http://schemas.openxmlformats.org/officeDocument/2006/relationships">
+  <p:cSld>
+    <p:spTree>
+      <p:nvGrpSpPr>
+        <p:cNvPr id="1" name=""/>
+        <p:cNvGrpSpPr/>
+        <p:nvPr/>
+      </p:nvGrpSpPr>
+      <p:grpSpPr>
+        <a:xfrm>
+          <a:off x="0" y="0"/>
+          <a:ext cx="0" cy="0"/>
+          <a:chOff x="0" y="0"/>
+          <a:chExt cx="0" cy="0"/>
+        </a:xfrm>
+      </p:grpSpPr>
+      <p:sp>
+        <p:nvSpPr>
+          <p:cNvPr id="2" name="Slide Image Placeholder 1"/>
+          <p:cNvSpPr>
+            <a:spLocks noGrp="1"/>
+          </p:cNvSpPr>
+          <p:nvPr>
+            <p:ph type="sldImg" idx="2"/>
+          </p:nvPr>
+        </p:nvSpPr>
+        <p:spPr/>
+      </p:sp>
+      <p:sp>
+        <p:nvSpPr>
+          <p:cNvPr id="3" name="Notes Placeholder 2"/>
+          <p:cNvSpPr>
+            <a:spLocks noGrp="1"/>
+          </p:cNvSpPr>
+          <p:nvPr>
+            <p:ph type="body" idx="3" sz="quarter"/>
+          </p:nvPr>
+        </p:nvSpPr>
+        <p:spPr/>
+        <p:txBody>
+          <a:bodyPr/>
+          <a:lstStyle/>
+          <a:p>
+            <a:r>
+              <a:t>ДДС = данък върху добавената стойност = 20%. Цена с ДДС = цена × 1.20.</a:t>
+            </a:r>
+          </a:p>
+          <a:p>
+            <a:r>
+              <a:t>Задачата показва верига: Split → Select(parse) → Select(addVAT) → ForEach(print).</a:t>
+            </a:r>
+          </a:p>
+          <a:p>
+            <a:r>
+              <a:t>Дайте 5 минути за самостоятелно решение.</a:t>
+            </a:r>
+          </a:p>
+        </p:txBody>
+      </p:sp>
+      <p:sp>
+        <p:nvSpPr>
+          <p:cNvPr id="4" name="Slide Number Placeholder 3"/>
+          <p:cNvSpPr>
+            <a:spLocks noGrp="1"/>
+          </p:cNvSpPr>
+          <p:nvPr>
+            <p:ph type="sldNum" idx="5" sz="quarter"/>
+          </p:nvPr>
+        </p:nvSpPr>
+        <p:spPr/>
+      </p:sp>
+    </p:spTree>
+  </p:cSld>
+  <p:clrMapOvr>
+    <a:masterClrMapping/>
+  </p:clrMapOvr>
+</p:notes>
+</file>
+
+<file path=ppt/notesSlides/notesSlide12.xml><?xml version="1.0" encoding="utf-8"?>
+<p:notes xmlns:a="http://schemas.openxmlformats.org/drawingml/2006/main" xmlns:p="http://schemas.openxmlformats.org/presentationml/2006/main" xmlns:r="http://schemas.openxmlformats.org/officeDocument/2006/relationships">
+  <p:cSld>
+    <p:spTree>
+      <p:nvGrpSpPr>
+        <p:cNvPr id="1" name=""/>
+        <p:cNvGrpSpPr/>
+        <p:nvPr/>
+      </p:nvGrpSpPr>
+      <p:grpSpPr>
+        <a:xfrm>
+          <a:off x="0" y="0"/>
+          <a:ext cx="0" cy="0"/>
+          <a:chOff x="0" y="0"/>
+          <a:chExt cx="0" cy="0"/>
+        </a:xfrm>
+      </p:grpSpPr>
+      <p:sp>
+        <p:nvSpPr>
+          <p:cNvPr id="2" name="Slide Image Placeholder 1"/>
+          <p:cNvSpPr>
+            <a:spLocks noGrp="1"/>
+          </p:cNvSpPr>
+          <p:nvPr>
+            <p:ph type="sldImg" idx="2"/>
+          </p:nvPr>
+        </p:nvSpPr>
+        <p:spPr/>
+      </p:sp>
+      <p:sp>
+        <p:nvSpPr>
+          <p:cNvPr id="3" name="Notes Placeholder 2"/>
+          <p:cNvSpPr>
+            <a:spLocks noGrp="1"/>
+          </p:cNvSpPr>
+          <p:nvPr>
+            <p:ph type="body" idx="3" sz="quarter"/>
+          </p:nvPr>
+        </p:nvSpPr>
+        <p:spPr/>
+        <p:txBody>
+          <a:bodyPr/>
+          <a:lstStyle/>
+          <a:p>
+            <a:r>
+              <a:t>Версия 1: всичко с ламбди инлайн — компактна, но по-трудна за четене.</a:t>
+            </a:r>
+          </a:p>
+          <a:p>
+            <a:r>
+              <a:t>.Select(double.Parse) — method group синтаксис — по-кратко от .Select(x =&gt; double.Parse(x)).</a:t>
+            </a:r>
+          </a:p>
+          <a:p>
+            <a:r>
+              <a:t>ForEach + format {n:F2} — форматиране с 2 десетични знака.</a:t>
+            </a:r>
+          </a:p>
+        </p:txBody>
+      </p:sp>
+      <p:sp>
+        <p:nvSpPr>
+          <p:cNvPr id="4" name="Slide Number Placeholder 3"/>
+          <p:cNvSpPr>
+            <a:spLocks noGrp="1"/>
+          </p:cNvSpPr>
+          <p:nvPr>
+            <p:ph type="sldNum" idx="5" sz="quarter"/>
+          </p:nvPr>
+        </p:nvSpPr>
+        <p:spPr/>
+      </p:sp>
+    </p:spTree>
+  </p:cSld>
+  <p:clrMapOvr>
+    <a:masterClrMapping/>
+  </p:clrMapOvr>
+</p:notes>
+</file>
+
+<file path=ppt/notesSlides/notesSlide13.xml><?xml version="1.0" encoding="utf-8"?>
+<p:notes xmlns:a="http://schemas.openxmlformats.org/drawingml/2006/main" xmlns:p="http://schemas.openxmlformats.org/presentationml/2006/main" xmlns:r="http://schemas.openxmlformats.org/officeDocument/2006/relationships">
+  <p:cSld>
+    <p:spTree>
+      <p:nvGrpSpPr>
+        <p:cNvPr id="1" name=""/>
+        <p:cNvGrpSpPr/>
+        <p:nvPr/>
+      </p:nvGrpSpPr>
+      <p:grpSpPr>
+        <a:xfrm>
+          <a:off x="0" y="0"/>
+          <a:ext cx="0" cy="0"/>
+          <a:chOff x="0" y="0"/>
+          <a:chExt cx="0" cy="0"/>
+        </a:xfrm>
+      </p:grpSpPr>
+      <p:sp>
+        <p:nvSpPr>
+          <p:cNvPr id="2" name="Slide Image Placeholder 1"/>
+          <p:cNvSpPr>
+            <a:spLocks noGrp="1"/>
+          </p:cNvSpPr>
+          <p:nvPr>
+            <p:ph type="sldImg" idx="2"/>
+          </p:nvPr>
+        </p:nvSpPr>
+        <p:spPr/>
+      </p:sp>
+      <p:sp>
+        <p:nvSpPr>
+          <p:cNvPr id="3" name="Notes Placeholder 2"/>
+          <p:cNvSpPr>
+            <a:spLocks noGrp="1"/>
+          </p:cNvSpPr>
+          <p:nvPr>
+            <p:ph type="body" idx="3" sz="quarter"/>
+          </p:nvPr>
+        </p:nvSpPr>
+        <p:spPr/>
+        <p:txBody>
+          <a:bodyPr/>
+          <a:lstStyle/>
+          <a:p>
+            <a:r>
+              <a:t>Версия 2: именувани Func за по-добра четимост.</a:t>
+            </a:r>
+          </a:p>
+          <a:p>
+            <a:r>
+              <a:t>Синтактична захар: компилаторът превежда n =&gt; int.Parse(n) до извикване на метод.</a:t>
+            </a:r>
+          </a:p>
+          <a:p>
+            <a:r>
+              <a:t>Сравнете двете версии — кой вариант е по-четим? Кой по-подходящ за production?</a:t>
+            </a:r>
+          </a:p>
+        </p:txBody>
+      </p:sp>
+      <p:sp>
+        <p:nvSpPr>
+          <p:cNvPr id="4" name="Slide Number Placeholder 3"/>
+          <p:cNvSpPr>
+            <a:spLocks noGrp="1"/>
+          </p:cNvSpPr>
+          <p:nvPr>
+            <p:ph type="sldNum" idx="5" sz="quarter"/>
+          </p:nvPr>
+        </p:nvSpPr>
+        <p:spPr/>
+      </p:sp>
+    </p:spTree>
+  </p:cSld>
+  <p:clrMapOvr>
+    <a:masterClrMapping/>
+  </p:clrMapOvr>
+</p:notes>
+</file>
+
+<file path=ppt/notesSlides/notesSlide14.xml><?xml version="1.0" encoding="utf-8"?>
+<p:notes xmlns:a="http://schemas.openxmlformats.org/drawingml/2006/main" xmlns:p="http://schemas.openxmlformats.org/presentationml/2006/main" xmlns:r="http://schemas.openxmlformats.org/officeDocument/2006/relationships">
+  <p:cSld>
+    <p:spTree>
+      <p:nvGrpSpPr>
+        <p:cNvPr id="1" name=""/>
+        <p:cNvGrpSpPr/>
+        <p:nvPr/>
+      </p:nvGrpSpPr>
+      <p:grpSpPr>
+        <a:xfrm>
+          <a:off x="0" y="0"/>
+          <a:ext cx="0" cy="0"/>
+          <a:chOff x="0" y="0"/>
+          <a:chExt cx="0" cy="0"/>
+        </a:xfrm>
+      </p:grpSpPr>
+      <p:sp>
+        <p:nvSpPr>
+          <p:cNvPr id="2" name="Slide Image Placeholder 1"/>
+          <p:cNvSpPr>
+            <a:spLocks noGrp="1"/>
+          </p:cNvSpPr>
+          <p:nvPr>
+            <p:ph type="sldImg" idx="2"/>
+          </p:nvPr>
+        </p:nvSpPr>
+        <p:spPr/>
+      </p:sp>
+      <p:sp>
+        <p:nvSpPr>
+          <p:cNvPr id="3" name="Notes Placeholder 2"/>
+          <p:cNvSpPr>
+            <a:spLocks noGrp="1"/>
+          </p:cNvSpPr>
+          <p:nvPr>
+            <p:ph type="body" idx="3" sz="quarter"/>
+          </p:nvPr>
+        </p:nvSpPr>
+        <p:spPr/>
+        <p:txBody>
+          <a:bodyPr/>
+          <a:lstStyle/>
+          <a:p>
+            <a:r>
+              <a:t>Ключова концепция: Operation() не знае КАКВО ще прави с числото — знае само, че ще получи int и ще върне int.</a:t>
+            </a:r>
+          </a:p>
+          <a:p>
+            <a:r>
+              <a:t>Конкретното поведение се инжектира отвън чрез параметъра operation.</a:t>
+            </a:r>
+          </a:p>
+          <a:p>
+            <a:r>
+              <a:t>Това е основата на Dependency Injection и Strategy Pattern в реален код.</a:t>
+            </a:r>
+          </a:p>
+          <a:p>
+            <a:r>
+              <a:t>Задайте: 'Как бихте направили метод, който сортира различно в зависимост от подадена функция?'</a:t>
+            </a:r>
+          </a:p>
+        </p:txBody>
+      </p:sp>
+      <p:sp>
+        <p:nvSpPr>
+          <p:cNvPr id="4" name="Slide Number Placeholder 3"/>
+          <p:cNvSpPr>
+            <a:spLocks noGrp="1"/>
+          </p:cNvSpPr>
+          <p:nvPr>
+            <p:ph type="sldNum" idx="5" sz="quarter"/>
+          </p:nvPr>
+        </p:nvSpPr>
+        <p:spPr/>
+      </p:sp>
+    </p:spTree>
+  </p:cSld>
+  <p:clrMapOvr>
+    <a:masterClrMapping/>
+  </p:clrMapOvr>
+</p:notes>
+</file>
+
+<file path=ppt/notesSlides/notesSlide15.xml><?xml version="1.0" encoding="utf-8"?>
+<p:notes xmlns:a="http://schemas.openxmlformats.org/drawingml/2006/main" xmlns:p="http://schemas.openxmlformats.org/presentationml/2006/main" xmlns:r="http://schemas.openxmlformats.org/officeDocument/2006/relationships">
+  <p:cSld>
+    <p:spTree>
+      <p:nvGrpSpPr>
+        <p:cNvPr id="1" name=""/>
+        <p:cNvGrpSpPr/>
+        <p:nvPr/>
+      </p:nvGrpSpPr>
+      <p:grpSpPr>
+        <a:xfrm>
+          <a:off x="0" y="0"/>
+          <a:ext cx="0" cy="0"/>
+          <a:chOff x="0" y="0"/>
+          <a:chExt cx="0" cy="0"/>
+        </a:xfrm>
+      </p:grpSpPr>
+      <p:sp>
+        <p:nvSpPr>
+          <p:cNvPr id="2" name="Slide Image Placeholder 1"/>
+          <p:cNvSpPr>
+            <a:spLocks noGrp="1"/>
+          </p:cNvSpPr>
+          <p:nvPr>
+            <p:ph type="sldImg" idx="2"/>
+          </p:nvPr>
+        </p:nvSpPr>
+        <p:spPr/>
+      </p:sp>
+      <p:sp>
+        <p:nvSpPr>
+          <p:cNvPr id="3" name="Notes Placeholder 2"/>
+          <p:cNvSpPr>
+            <a:spLocks noGrp="1"/>
+          </p:cNvSpPr>
+          <p:nvPr>
+            <p:ph type="body" idx="3" sz="quarter"/>
+          </p:nvPr>
+        </p:nvSpPr>
+        <p:spPr/>
+        <p:txBody>
+          <a:bodyPr/>
+          <a:lstStyle/>
+          <a:p>
+            <a:r>
+              <a:t>По-сложна задача — четири слайда с решение!</a:t>
+            </a:r>
+          </a:p>
+          <a:p>
+            <a:r>
+              <a:t>Покажете структурата преди кода: три метода — CreateTester, CreatePrinter, PrintFilteredStudent.</a:t>
+            </a:r>
+          </a:p>
+          <a:p>
+            <a:r>
+              <a:t>Ключова идея: методът 'фабрика' (CreateTester) НЕ извършва операцията — той СЪЗДАВА функцията, която ще я извърши по-късно.</a:t>
+            </a:r>
+          </a:p>
+          <a:p>
+            <a:r>
+              <a:t>Разпределете работата: нека учениците напишат само CreateTester, вие напишете останалото.</a:t>
+            </a:r>
+          </a:p>
+        </p:txBody>
+      </p:sp>
+      <p:sp>
+        <p:nvSpPr>
+          <p:cNvPr id="4" name="Slide Number Placeholder 3"/>
+          <p:cNvSpPr>
+            <a:spLocks noGrp="1"/>
+          </p:cNvSpPr>
+          <p:nvPr>
+            <p:ph type="sldNum" idx="5" sz="quarter"/>
+          </p:nvPr>
+        </p:nvSpPr>
+        <p:spPr/>
+      </p:sp>
+    </p:spTree>
+  </p:cSld>
+  <p:clrMapOvr>
+    <a:masterClrMapping/>
+  </p:clrMapOvr>
+</p:notes>
+</file>
+
+<file path=ppt/notesSlides/notesSlide16.xml><?xml version="1.0" encoding="utf-8"?>
+<p:notes xmlns:a="http://schemas.openxmlformats.org/drawingml/2006/main" xmlns:p="http://schemas.openxmlformats.org/presentationml/2006/main" xmlns:r="http://schemas.openxmlformats.org/officeDocument/2006/relationships">
+  <p:cSld>
+    <p:spTree>
+      <p:nvGrpSpPr>
+        <p:cNvPr id="1" name=""/>
+        <p:cNvGrpSpPr/>
+        <p:nvPr/>
+      </p:nvGrpSpPr>
+      <p:grpSpPr>
+        <a:xfrm>
+          <a:off x="0" y="0"/>
+          <a:ext cx="0" cy="0"/>
+          <a:chOff x="0" y="0"/>
+          <a:chExt cx="0" cy="0"/>
+        </a:xfrm>
+      </p:grpSpPr>
+      <p:sp>
+        <p:nvSpPr>
+          <p:cNvPr id="2" name="Slide Image Placeholder 1"/>
+          <p:cNvSpPr>
+            <a:spLocks noGrp="1"/>
+          </p:cNvSpPr>
+          <p:nvPr>
+            <p:ph type="sldImg" idx="2"/>
+          </p:nvPr>
+        </p:nvSpPr>
+        <p:spPr/>
+      </p:sp>
+      <p:sp>
+        <p:nvSpPr>
+          <p:cNvPr id="3" name="Notes Placeholder 2"/>
+          <p:cNvSpPr>
+            <a:spLocks noGrp="1"/>
+          </p:cNvSpPr>
+          <p:nvPr>
+            <p:ph type="body" idx="3" sz="quarter"/>
+          </p:nvPr>
+        </p:nvSpPr>
+        <p:spPr/>
+        <p:txBody>
+          <a:bodyPr/>
+          <a:lstStyle/>
+          <a:p>
+            <a:r>
+              <a:t>CreateTester ВРЪЩА Func&lt;int, bool&gt; — функция, не стойност!</a:t>
+            </a:r>
+          </a:p>
+          <a:p>
+            <a:r>
+              <a:t>switch израз, който конструира различна ламбда в зависимост от condition.</a:t>
+            </a:r>
+          </a:p>
+          <a:p>
+            <a:r>
+              <a:t>Аналогия: като производство на инструменти — CreateTester е фабрика за тестери.</a:t>
+            </a:r>
+          </a:p>
+        </p:txBody>
+      </p:sp>
+      <p:sp>
+        <p:nvSpPr>
+          <p:cNvPr id="4" name="Slide Number Placeholder 3"/>
+          <p:cNvSpPr>
+            <a:spLocks noGrp="1"/>
+          </p:cNvSpPr>
+          <p:nvPr>
+            <p:ph type="sldNum" idx="5" sz="quarter"/>
+          </p:nvPr>
+        </p:nvSpPr>
+        <p:spPr/>
+      </p:sp>
+    </p:spTree>
+  </p:cSld>
+  <p:clrMapOvr>
+    <a:masterClrMapping/>
+  </p:clrMapOvr>
+</p:notes>
+</file>
+
+<file path=ppt/notesSlides/notesSlide17.xml><?xml version="1.0" encoding="utf-8"?>
+<p:notes xmlns:a="http://schemas.openxmlformats.org/drawingml/2006/main" xmlns:p="http://schemas.openxmlformats.org/presentationml/2006/main" xmlns:r="http://schemas.openxmlformats.org/officeDocument/2006/relationships">
+  <p:cSld>
+    <p:spTree>
+      <p:nvGrpSpPr>
+        <p:cNvPr id="1" name=""/>
+        <p:cNvGrpSpPr/>
+        <p:nvPr/>
+      </p:nvGrpSpPr>
+      <p:grpSpPr>
+        <a:xfrm>
+          <a:off x="0" y="0"/>
+          <a:ext cx="0" cy="0"/>
+          <a:chOff x="0" y="0"/>
+          <a:chExt cx="0" cy="0"/>
+        </a:xfrm>
+      </p:grpSpPr>
+      <p:sp>
+        <p:nvSpPr>
+          <p:cNvPr id="2" name="Slide Image Placeholder 1"/>
+          <p:cNvSpPr>
+            <a:spLocks noGrp="1"/>
+          </p:cNvSpPr>
+          <p:nvPr>
+            <p:ph type="sldImg" idx="2"/>
+          </p:nvPr>
+        </p:nvSpPr>
+        <p:spPr/>
+      </p:sp>
+      <p:sp>
+        <p:nvSpPr>
+          <p:cNvPr id="3" name="Notes Placeholder 2"/>
+          <p:cNvSpPr>
+            <a:spLocks noGrp="1"/>
+          </p:cNvSpPr>
+          <p:nvPr>
+            <p:ph type="body" idx="3" sz="quarter"/>
+          </p:nvPr>
+        </p:nvSpPr>
+        <p:spPr/>
+        <p:txBody>
+          <a:bodyPr/>
+          <a:lstStyle/>
+          <a:p>
+            <a:r>
+              <a:t>CreatePrinter ВРЪЩА Action&lt;KeyValuePair&lt;string, int&gt;&gt; — отново функция!</a:t>
+            </a:r>
+          </a:p>
+          <a:p>
+            <a:r>
+              <a:t>KeyValuePair&lt;string, int&gt; е двойка (ключ, стойност) от Dictionary.</a:t>
+            </a:r>
+          </a:p>
+          <a:p>
+            <a:r>
+              <a:t>Три формата: само имe, само възраст, или и двете.</a:t>
+            </a:r>
+          </a:p>
+        </p:txBody>
+      </p:sp>
+      <p:sp>
+        <p:nvSpPr>
+          <p:cNvPr id="4" name="Slide Number Placeholder 3"/>
+          <p:cNvSpPr>
+            <a:spLocks noGrp="1"/>
+          </p:cNvSpPr>
+          <p:nvPr>
+            <p:ph type="sldNum" idx="5" sz="quarter"/>
+          </p:nvPr>
+        </p:nvSpPr>
+        <p:spPr/>
+      </p:sp>
+    </p:spTree>
+  </p:cSld>
+  <p:clrMapOvr>
+    <a:masterClrMapping/>
+  </p:clrMapOvr>
+</p:notes>
+</file>
+
+<file path=ppt/notesSlides/notesSlide18.xml><?xml version="1.0" encoding="utf-8"?>
+<p:notes xmlns:a="http://schemas.openxmlformats.org/drawingml/2006/main" xmlns:p="http://schemas.openxmlformats.org/presentationml/2006/main" xmlns:r="http://schemas.openxmlformats.org/officeDocument/2006/relationships">
+  <p:cSld>
+    <p:spTree>
+      <p:nvGrpSpPr>
+        <p:cNvPr id="1" name=""/>
+        <p:cNvGrpSpPr/>
+        <p:nvPr/>
+      </p:nvGrpSpPr>
+      <p:grpSpPr>
+        <a:xfrm>
+          <a:off x="0" y="0"/>
+          <a:ext cx="0" cy="0"/>
+          <a:chOff x="0" y="0"/>
+          <a:chExt cx="0" cy="0"/>
+        </a:xfrm>
+      </p:grpSpPr>
+      <p:sp>
+        <p:nvSpPr>
+          <p:cNvPr id="2" name="Slide Image Placeholder 1"/>
+          <p:cNvSpPr>
+            <a:spLocks noGrp="1"/>
+          </p:cNvSpPr>
+          <p:nvPr>
+            <p:ph type="sldImg" idx="2"/>
+          </p:nvPr>
+        </p:nvSpPr>
+        <p:spPr/>
+      </p:sp>
+      <p:sp>
+        <p:nvSpPr>
+          <p:cNvPr id="3" name="Notes Placeholder 2"/>
+          <p:cNvSpPr>
+            <a:spLocks noGrp="1"/>
+          </p:cNvSpPr>
+          <p:nvPr>
+            <p:ph type="body" idx="3" sz="quarter"/>
+          </p:nvPr>
+        </p:nvSpPr>
+        <p:spPr/>
+        <p:txBody>
+          <a:bodyPr/>
+          <a:lstStyle/>
+          <a:p>
+            <a:r>
+              <a:t>PrintFilteredStudent ПРИЕМА и двете функции като параметри!</a:t>
+            </a:r>
+          </a:p>
+          <a:p>
+            <a:r>
+              <a:t>Забележете: методът не знае нито условието, нито формата — всичко е инжектирано.</a:t>
+            </a:r>
+          </a:p>
+          <a:p>
+            <a:r>
+              <a:t>Това е чистата форма на Strategy Pattern — изключително важен design pattern.</a:t>
+            </a:r>
+          </a:p>
+          <a:p>
+            <a:r>
+              <a:t>Предимство: добавянето на нов формат не изисква промяна на PrintFilteredStudent.</a:t>
+            </a:r>
+          </a:p>
+        </p:txBody>
+      </p:sp>
+      <p:sp>
+        <p:nvSpPr>
+          <p:cNvPr id="4" name="Slide Number Placeholder 3"/>
+          <p:cNvSpPr>
+            <a:spLocks noGrp="1"/>
+          </p:cNvSpPr>
+          <p:nvPr>
+            <p:ph type="sldNum" idx="5" sz="quarter"/>
+          </p:nvPr>
+        </p:nvSpPr>
+        <p:spPr/>
+      </p:sp>
+    </p:spTree>
+  </p:cSld>
+  <p:clrMapOvr>
+    <a:masterClrMapping/>
+  </p:clrMapOvr>
+</p:notes>
+</file>
+
+<file path=ppt/notesSlides/notesSlide19.xml><?xml version="1.0" encoding="utf-8"?>
+<p:notes xmlns:a="http://schemas.openxmlformats.org/drawingml/2006/main" xmlns:p="http://schemas.openxmlformats.org/presentationml/2006/main" xmlns:r="http://schemas.openxmlformats.org/officeDocument/2006/relationships">
+  <p:cSld>
+    <p:spTree>
+      <p:nvGrpSpPr>
+        <p:cNvPr id="1" name=""/>
+        <p:cNvGrpSpPr/>
+        <p:nvPr/>
+      </p:nvGrpSpPr>
+      <p:grpSpPr>
+        <a:xfrm>
+          <a:off x="0" y="0"/>
+          <a:ext cx="0" cy="0"/>
+          <a:chOff x="0" y="0"/>
+          <a:chExt cx="0" cy="0"/>
+        </a:xfrm>
+      </p:grpSpPr>
+      <p:sp>
+        <p:nvSpPr>
+          <p:cNvPr id="2" name="Slide Image Placeholder 1"/>
+          <p:cNvSpPr>
+            <a:spLocks noGrp="1"/>
+          </p:cNvSpPr>
+          <p:nvPr>
+            <p:ph type="sldImg" idx="2"/>
+          </p:nvPr>
+        </p:nvSpPr>
+        <p:spPr/>
+      </p:sp>
+      <p:sp>
+        <p:nvSpPr>
+          <p:cNvPr id="3" name="Notes Placeholder 2"/>
+          <p:cNvSpPr>
+            <a:spLocks noGrp="1"/>
+          </p:cNvSpPr>
+          <p:nvPr>
+            <p:ph type="body" idx="3" sz="quarter"/>
+          </p:nvPr>
+        </p:nvSpPr>
+        <p:spPr/>
+        <p:txBody>
+          <a:bodyPr/>
+          <a:lstStyle/>
+          <a:p>
+            <a:r>
+              <a:t>Обобщение:</a:t>
+            </a:r>
+          </a:p>
+          <a:p>
+            <a:r>
+              <a:t>Func&lt;T,TResult&gt; — функция с резултат</a:t>
+            </a:r>
+          </a:p>
+          <a:p>
+            <a:r>
+              <a:t>Action&lt;T&gt; — процедура без резултат</a:t>
+            </a:r>
+          </a:p>
+          <a:p>
+            <a:r>
+              <a:t>Предаване като параметри — Strategy Pattern</a:t>
+            </a:r>
+          </a:p>
+          <a:p>
+            <a:r>
+              <a:t>Реален свят: LINQ Where, Select, OrderBy всички приемат Func.</a:t>
+            </a:r>
+          </a:p>
+          <a:p>
+            <a:r>
+              <a:t>Следваща стъпка: Events и EventHandlers — разширение на делегатите.</a:t>
+            </a:r>
+          </a:p>
+        </p:txBody>
+      </p:sp>
+      <p:sp>
+        <p:nvSpPr>
+          <p:cNvPr id="4" name="Slide Number Placeholder 3"/>
+          <p:cNvSpPr>
+            <a:spLocks noGrp="1"/>
+          </p:cNvSpPr>
+          <p:nvPr>
+            <p:ph type="sldNum" idx="5" sz="quarter"/>
+          </p:nvPr>
+        </p:nvSpPr>
+        <p:spPr/>
+      </p:sp>
+    </p:spTree>
   </p:cSld>
   <p:clrMapOvr>
     <a:masterClrMapping/>
@@ -731,7 +1569,14 @@
           <a:bodyPr/>
           <a:lstStyle/>
           <a:p>
-            <a:endParaRPr lang="en-US" dirty="0"/>
+            <a:r>
+              <a:t>Краен слайд. Насочете учениците към SoftUni Judge за упражнения.</a:t>
+            </a:r>
+          </a:p>
+          <a:p>
+            <a:r>
+              <a:t>Следваща тема: Изключения (Exception Handling) или Events.</a:t>
+            </a:r>
           </a:p>
         </p:txBody>
       </p:sp>
@@ -816,6 +1661,1181 @@
         <p14:creationId xmlns:p14="http://schemas.microsoft.com/office/powerpoint/2010/main" val="1044928254"/>
       </p:ext>
     </p:extLst>
+  </p:cSld>
+  <p:clrMapOvr>
+    <a:masterClrMapping/>
+  </p:clrMapOvr>
+</p:notes>
+</file>
+
+<file path=ppt/notesSlides/notesSlide20.xml><?xml version="1.0" encoding="utf-8"?>
+<p:notes xmlns:a="http://schemas.openxmlformats.org/drawingml/2006/main" xmlns:p="http://schemas.openxmlformats.org/presentationml/2006/main" xmlns:r="http://schemas.openxmlformats.org/officeDocument/2006/relationships">
+  <p:cSld>
+    <p:spTree>
+      <p:nvGrpSpPr>
+        <p:cNvPr id="1" name=""/>
+        <p:cNvGrpSpPr/>
+        <p:nvPr/>
+      </p:nvGrpSpPr>
+      <p:grpSpPr>
+        <a:xfrm>
+          <a:off x="0" y="0"/>
+          <a:ext cx="0" cy="0"/>
+          <a:chOff x="0" y="0"/>
+          <a:chExt cx="0" cy="0"/>
+        </a:xfrm>
+      </p:grpSpPr>
+      <p:sp>
+        <p:nvSpPr>
+          <p:cNvPr id="2" name="Slide Image Placeholder 1"/>
+          <p:cNvSpPr>
+            <a:spLocks noGrp="1"/>
+          </p:cNvSpPr>
+          <p:nvPr>
+            <p:ph type="sldImg" idx="2"/>
+          </p:nvPr>
+        </p:nvSpPr>
+        <p:spPr/>
+      </p:sp>
+      <p:sp>
+        <p:nvSpPr>
+          <p:cNvPr id="3" name="Notes Placeholder 2"/>
+          <p:cNvSpPr>
+            <a:spLocks noGrp="1"/>
+          </p:cNvSpPr>
+          <p:nvPr>
+            <p:ph type="body" idx="3" sz="quarter"/>
+          </p:nvPr>
+        </p:nvSpPr>
+        <p:spPr/>
+        <p:txBody>
+          <a:bodyPr/>
+          <a:lstStyle/>
+          <a:p>
+            <a:r>
+              <a:t>МОТИВАЦИЯ — Ключов слайд!</a:t>
+            </a:r>
+          </a:p>
+          <a:p>
+            <a:r>
+              <a:t>Покажете двата варианта един до друг. Без делегати — два почти идентични метода. С делегат — един метод, три начина на извикване.</a:t>
+            </a:r>
+          </a:p>
+          <a:p>
+            <a:r>
+              <a:t>Принцип: Open/Closed Principle — отворен за разширение, затворен за промяна.</a:t>
+            </a:r>
+          </a:p>
+          <a:p>
+            <a:r>
+              <a:t>Реален пример: Array.Sort() приема IComparer или Comparison&lt;T&gt; — точно това е идеята.</a:t>
+            </a:r>
+          </a:p>
+          <a:p>
+            <a:r>
+              <a:t>Запитайте: 'Какво ще стане ако трябва четвърти начин на сортиране? Без делегати — трети метод. С делегат — само нов аргумент.'</a:t>
+            </a:r>
+          </a:p>
+        </p:txBody>
+      </p:sp>
+      <p:sp>
+        <p:nvSpPr>
+          <p:cNvPr id="4" name="Slide Number Placeholder 3"/>
+          <p:cNvSpPr>
+            <a:spLocks noGrp="1"/>
+          </p:cNvSpPr>
+          <p:nvPr>
+            <p:ph type="sldNum" idx="5" sz="quarter"/>
+          </p:nvPr>
+        </p:nvSpPr>
+        <p:spPr/>
+      </p:sp>
+    </p:spTree>
+  </p:cSld>
+  <p:clrMapOvr>
+    <a:masterClrMapping/>
+  </p:clrMapOvr>
+</p:notes>
+</file>
+
+<file path=ppt/notesSlides/notesSlide21.xml><?xml version="1.0" encoding="utf-8"?>
+<p:notes xmlns:a="http://schemas.openxmlformats.org/drawingml/2006/main" xmlns:p="http://schemas.openxmlformats.org/presentationml/2006/main" xmlns:r="http://schemas.openxmlformats.org/officeDocument/2006/relationships">
+  <p:cSld>
+    <p:spTree>
+      <p:nvGrpSpPr>
+        <p:cNvPr id="1" name=""/>
+        <p:cNvGrpSpPr/>
+        <p:nvPr/>
+      </p:nvGrpSpPr>
+      <p:grpSpPr>
+        <a:xfrm>
+          <a:off x="0" y="0"/>
+          <a:ext cx="0" cy="0"/>
+          <a:chOff x="0" y="0"/>
+          <a:chExt cx="0" cy="0"/>
+        </a:xfrm>
+      </p:grpSpPr>
+      <p:sp>
+        <p:nvSpPr>
+          <p:cNvPr id="2" name="Slide Image Placeholder 1"/>
+          <p:cNvSpPr>
+            <a:spLocks noGrp="1"/>
+          </p:cNvSpPr>
+          <p:nvPr>
+            <p:ph type="sldImg" idx="2"/>
+          </p:nvPr>
+        </p:nvSpPr>
+        <p:spPr/>
+      </p:sp>
+      <p:sp>
+        <p:nvSpPr>
+          <p:cNvPr id="3" name="Notes Placeholder 2"/>
+          <p:cNvSpPr>
+            <a:spLocks noGrp="1"/>
+          </p:cNvSpPr>
+          <p:nvPr>
+            <p:ph type="body" idx="3" sz="quarter"/>
+          </p:nvPr>
+        </p:nvSpPr>
+        <p:spPr/>
+        <p:txBody>
+          <a:bodyPr/>
+          <a:lstStyle/>
+          <a:p>
+            <a:r>
+              <a:t>Общото правило: Func&lt;T1, T2, ..., TResult&gt; — всички типове преди последния са входни параметри, последният е изходен.</a:t>
+            </a:r>
+          </a:p>
+          <a:p>
+            <a:r>
+              <a:t>Func без параметри: Func&lt;TResult&gt; = () =&gt; стойност;</a:t>
+            </a:r>
+          </a:p>
+          <a:p>
+            <a:r>
+              <a:t>Максимум: Func&lt;T1, T2, ..., T16, TResult&gt; — 16 типа, 15 входни + 1 изходен.</a:t>
+            </a:r>
+          </a:p>
+          <a:p>
+            <a:r>
+              <a:t>Типична грешка: объркване на реда на типовете. Func&lt;string, int&gt; приема string и ВРЪЩА int, НЕ обратното.</a:t>
+            </a:r>
+          </a:p>
+          <a:p>
+            <a:r>
+              <a:t>Задача: дефинирайте Func&lt;double, double, double&gt; за изчисляване на хипотенуза по Питагор.</a:t>
+            </a:r>
+          </a:p>
+        </p:txBody>
+      </p:sp>
+      <p:sp>
+        <p:nvSpPr>
+          <p:cNvPr id="4" name="Slide Number Placeholder 3"/>
+          <p:cNvSpPr>
+            <a:spLocks noGrp="1"/>
+          </p:cNvSpPr>
+          <p:nvPr>
+            <p:ph type="sldNum" idx="5" sz="quarter"/>
+          </p:nvPr>
+        </p:nvSpPr>
+        <p:spPr/>
+      </p:sp>
+    </p:spTree>
+  </p:cSld>
+  <p:clrMapOvr>
+    <a:masterClrMapping/>
+  </p:clrMapOvr>
+</p:notes>
+</file>
+
+<file path=ppt/notesSlides/notesSlide22.xml><?xml version="1.0" encoding="utf-8"?>
+<p:notes xmlns:a="http://schemas.openxmlformats.org/drawingml/2006/main" xmlns:p="http://schemas.openxmlformats.org/presentationml/2006/main" xmlns:r="http://schemas.openxmlformats.org/officeDocument/2006/relationships">
+  <p:cSld>
+    <p:spTree>
+      <p:nvGrpSpPr>
+        <p:cNvPr id="1" name=""/>
+        <p:cNvGrpSpPr/>
+        <p:nvPr/>
+      </p:nvGrpSpPr>
+      <p:grpSpPr>
+        <a:xfrm>
+          <a:off x="0" y="0"/>
+          <a:ext cx="0" cy="0"/>
+          <a:chOff x="0" y="0"/>
+          <a:chExt cx="0" cy="0"/>
+        </a:xfrm>
+      </p:grpSpPr>
+      <p:sp>
+        <p:nvSpPr>
+          <p:cNvPr id="2" name="Slide Image Placeholder 1"/>
+          <p:cNvSpPr>
+            <a:spLocks noGrp="1"/>
+          </p:cNvSpPr>
+          <p:nvPr>
+            <p:ph type="sldImg" idx="2"/>
+          </p:nvPr>
+        </p:nvSpPr>
+        <p:spPr/>
+      </p:sp>
+      <p:sp>
+        <p:nvSpPr>
+          <p:cNvPr id="3" name="Notes Placeholder 2"/>
+          <p:cNvSpPr>
+            <a:spLocks noGrp="1"/>
+          </p:cNvSpPr>
+          <p:nvPr>
+            <p:ph type="body" idx="3" sz="quarter"/>
+          </p:nvPr>
+        </p:nvSpPr>
+        <p:spPr/>
+        <p:txBody>
+          <a:bodyPr/>
+          <a:lstStyle/>
+          <a:p>
+            <a:r>
+              <a:t>Predicate&lt;T&gt; е по-стар тип (C# 2.0) — въведен преди Func. Запазен за обратна съвместимост.</a:t>
+            </a:r>
+          </a:p>
+          <a:p>
+            <a:r>
+              <a:t>В нов код предпочитайте Func&lt;T, bool&gt; — по-гъвкаво.</a:t>
+            </a:r>
+          </a:p>
+          <a:p>
+            <a:r>
+              <a:t>Find vs FirstOrDefault (LINQ): Find е метод на List&lt;T&gt;, FirstOrDefault работи с всякакъв IEnumerable.</a:t>
+            </a:r>
+          </a:p>
+          <a:p>
+            <a:r>
+              <a:t>RemoveAll е много полезен: nums.RemoveAll(x =&gt; x &lt; 0) — премахване на всички отрицателни числа.</a:t>
+            </a:r>
+          </a:p>
+          <a:p>
+            <a:r>
+              <a:t>Exists — още един метод: nums.Exists(x =&gt; x &gt; 100) — еквивалентно на nums.Any(x =&gt; x &gt; 100).</a:t>
+            </a:r>
+          </a:p>
+          <a:p>
+            <a:r>
+              <a:t>Задача: прочетете думи, премахнете всички с дължина &gt; 6, изведете останалите.</a:t>
+            </a:r>
+          </a:p>
+        </p:txBody>
+      </p:sp>
+      <p:sp>
+        <p:nvSpPr>
+          <p:cNvPr id="4" name="Slide Number Placeholder 3"/>
+          <p:cNvSpPr>
+            <a:spLocks noGrp="1"/>
+          </p:cNvSpPr>
+          <p:nvPr>
+            <p:ph type="sldNum" idx="5" sz="quarter"/>
+          </p:nvPr>
+        </p:nvSpPr>
+        <p:spPr/>
+      </p:sp>
+    </p:spTree>
+  </p:cSld>
+  <p:clrMapOvr>
+    <a:masterClrMapping/>
+  </p:clrMapOvr>
+</p:notes>
+</file>
+
+<file path=ppt/notesSlides/notesSlide23.xml><?xml version="1.0" encoding="utf-8"?>
+<p:notes xmlns:a="http://schemas.openxmlformats.org/drawingml/2006/main" xmlns:p="http://schemas.openxmlformats.org/presentationml/2006/main" xmlns:r="http://schemas.openxmlformats.org/officeDocument/2006/relationships">
+  <p:cSld>
+    <p:spTree>
+      <p:nvGrpSpPr>
+        <p:cNvPr id="1" name=""/>
+        <p:cNvGrpSpPr/>
+        <p:nvPr/>
+      </p:nvGrpSpPr>
+      <p:grpSpPr>
+        <a:xfrm>
+          <a:off x="0" y="0"/>
+          <a:ext cx="0" cy="0"/>
+          <a:chOff x="0" y="0"/>
+          <a:chExt cx="0" cy="0"/>
+        </a:xfrm>
+      </p:grpSpPr>
+      <p:sp>
+        <p:nvSpPr>
+          <p:cNvPr id="2" name="Slide Image Placeholder 1"/>
+          <p:cNvSpPr>
+            <a:spLocks noGrp="1"/>
+          </p:cNvSpPr>
+          <p:nvPr>
+            <p:ph type="sldImg" idx="2"/>
+          </p:nvPr>
+        </p:nvSpPr>
+        <p:spPr/>
+      </p:sp>
+      <p:sp>
+        <p:nvSpPr>
+          <p:cNvPr id="3" name="Notes Placeholder 2"/>
+          <p:cNvSpPr>
+            <a:spLocks noGrp="1"/>
+          </p:cNvSpPr>
+          <p:nvPr>
+            <p:ph type="body" idx="3" sz="quarter"/>
+          </p:nvPr>
+        </p:nvSpPr>
+        <p:spPr/>
+        <p:txBody>
+          <a:bodyPr/>
+          <a:lstStyle/>
+          <a:p>
+            <a:r>
+              <a:t>Multicast делегатите са основата на системата от Events в C# (Button.Click += handler).</a:t>
+            </a:r>
+          </a:p>
+          <a:p>
+            <a:r>
+              <a:t>Важно: Func&lt;T&gt; може да е multicast, но само последната върната стойност се ползва — не е препоръчително.</a:t>
+            </a:r>
+          </a:p>
+          <a:p>
+            <a:r>
+              <a:t>Порядъкът на изпълнение = порядъкът на добавяне (+=).</a:t>
+            </a:r>
+          </a:p>
+          <a:p>
+            <a:r>
+              <a:t>Ако делегат хвърли изключение — следващите в списъка НЕ се изпълняват!</a:t>
+            </a:r>
+          </a:p>
+          <a:p>
+            <a:r>
+              <a:t>За да избегнете това: GetInvocationList() + try/catch за всеки делегат поотделно.</a:t>
+            </a:r>
+          </a:p>
+          <a:p>
+            <a:r>
+              <a:t>Аналогия с реалния свят: спринклерна система — при пожар (събитие) се задействат множество действия едновременно.</a:t>
+            </a:r>
+          </a:p>
+        </p:txBody>
+      </p:sp>
+      <p:sp>
+        <p:nvSpPr>
+          <p:cNvPr id="4" name="Slide Number Placeholder 3"/>
+          <p:cNvSpPr>
+            <a:spLocks noGrp="1"/>
+          </p:cNvSpPr>
+          <p:nvPr>
+            <p:ph type="sldNum" idx="5" sz="quarter"/>
+          </p:nvPr>
+        </p:nvSpPr>
+        <p:spPr/>
+      </p:sp>
+    </p:spTree>
+  </p:cSld>
+  <p:clrMapOvr>
+    <a:masterClrMapping/>
+  </p:clrMapOvr>
+</p:notes>
+</file>
+
+<file path=ppt/notesSlides/notesSlide24.xml><?xml version="1.0" encoding="utf-8"?>
+<p:notes xmlns:a="http://schemas.openxmlformats.org/drawingml/2006/main" xmlns:p="http://schemas.openxmlformats.org/presentationml/2006/main" xmlns:r="http://schemas.openxmlformats.org/officeDocument/2006/relationships">
+  <p:cSld>
+    <p:spTree>
+      <p:nvGrpSpPr>
+        <p:cNvPr id="1" name=""/>
+        <p:cNvGrpSpPr/>
+        <p:nvPr/>
+      </p:nvGrpSpPr>
+      <p:grpSpPr>
+        <a:xfrm>
+          <a:off x="0" y="0"/>
+          <a:ext cx="0" cy="0"/>
+          <a:chOff x="0" y="0"/>
+          <a:chExt cx="0" cy="0"/>
+        </a:xfrm>
+      </p:grpSpPr>
+      <p:sp>
+        <p:nvSpPr>
+          <p:cNvPr id="2" name="Slide Image Placeholder 1"/>
+          <p:cNvSpPr>
+            <a:spLocks noGrp="1"/>
+          </p:cNvSpPr>
+          <p:nvPr>
+            <p:ph type="sldImg" idx="2"/>
+          </p:nvPr>
+        </p:nvSpPr>
+        <p:spPr/>
+      </p:sp>
+      <p:sp>
+        <p:nvSpPr>
+          <p:cNvPr id="3" name="Notes Placeholder 2"/>
+          <p:cNvSpPr>
+            <a:spLocks noGrp="1"/>
+          </p:cNvSpPr>
+          <p:nvPr>
+            <p:ph type="body" idx="3" sz="quarter"/>
+          </p:nvPr>
+        </p:nvSpPr>
+        <p:spPr/>
+        <p:txBody>
+          <a:bodyPr/>
+          <a:lstStyle/>
+          <a:p>
+            <a:r>
+              <a:t>Покажете историческата еволюция — учениците разбират защо ламбдата е 'синтактична захар'.</a:t>
+            </a:r>
+          </a:p>
+          <a:p>
+            <a:r>
+              <a:t>Именован метод: полезен когато логиката се ползва на множество места — DRY принцип.</a:t>
+            </a:r>
+          </a:p>
+          <a:p>
+            <a:r>
+              <a:t>Анонимен метод: вече рядко се пише — само в legacy код от .NET 2.0.</a:t>
+            </a:r>
+          </a:p>
+          <a:p>
+            <a:r>
+              <a:t>Ламбда: стандарт от .NET 3.5 насам. Кратка, четима, инлайн.</a:t>
+            </a:r>
+          </a:p>
+          <a:p>
+            <a:r>
+              <a:t>Ламбда с блок: когато логиката не се събира в един израз — добавя се { } с return.</a:t>
+            </a:r>
+          </a:p>
+          <a:p>
+            <a:r>
+              <a:t>Компилаторът превежда ламбдата до анонимен метод — никакъв performance overhead.</a:t>
+            </a:r>
+          </a:p>
+          <a:p>
+            <a:r>
+              <a:t>Задача: препишете упражнение от предишния урок по три начина и сравнете.</a:t>
+            </a:r>
+          </a:p>
+        </p:txBody>
+      </p:sp>
+      <p:sp>
+        <p:nvSpPr>
+          <p:cNvPr id="4" name="Slide Number Placeholder 3"/>
+          <p:cNvSpPr>
+            <a:spLocks noGrp="1"/>
+          </p:cNvSpPr>
+          <p:nvPr>
+            <p:ph type="sldNum" idx="5" sz="quarter"/>
+          </p:nvPr>
+        </p:nvSpPr>
+        <p:spPr/>
+      </p:sp>
+    </p:spTree>
+  </p:cSld>
+  <p:clrMapOvr>
+    <a:masterClrMapping/>
+  </p:clrMapOvr>
+</p:notes>
+</file>
+
+<file path=ppt/notesSlides/notesSlide25.xml><?xml version="1.0" encoding="utf-8"?>
+<p:notes xmlns:a="http://schemas.openxmlformats.org/drawingml/2006/main" xmlns:p="http://schemas.openxmlformats.org/presentationml/2006/main" xmlns:r="http://schemas.openxmlformats.org/officeDocument/2006/relationships">
+  <p:cSld>
+    <p:spTree>
+      <p:nvGrpSpPr>
+        <p:cNvPr id="1" name=""/>
+        <p:cNvGrpSpPr/>
+        <p:nvPr/>
+      </p:nvGrpSpPr>
+      <p:grpSpPr>
+        <a:xfrm>
+          <a:off x="0" y="0"/>
+          <a:ext cx="0" cy="0"/>
+          <a:chOff x="0" y="0"/>
+          <a:chExt cx="0" cy="0"/>
+        </a:xfrm>
+      </p:grpSpPr>
+      <p:sp>
+        <p:nvSpPr>
+          <p:cNvPr id="2" name="Slide Image Placeholder 1"/>
+          <p:cNvSpPr>
+            <a:spLocks noGrp="1"/>
+          </p:cNvSpPr>
+          <p:nvPr>
+            <p:ph type="sldImg" idx="2"/>
+          </p:nvPr>
+        </p:nvSpPr>
+        <p:spPr/>
+      </p:sp>
+      <p:sp>
+        <p:nvSpPr>
+          <p:cNvPr id="3" name="Notes Placeholder 2"/>
+          <p:cNvSpPr>
+            <a:spLocks noGrp="1"/>
+          </p:cNvSpPr>
+          <p:nvPr>
+            <p:ph type="body" idx="3" sz="quarter"/>
+          </p:nvPr>
+        </p:nvSpPr>
+        <p:spPr/>
+        <p:txBody>
+          <a:bodyPr/>
+          <a:lstStyle/>
+          <a:p>
+            <a:r>
+              <a:t>Strategy Pattern е един от 23-те класически Design Patterns (GoF).</a:t>
+            </a:r>
+          </a:p>
+          <a:p>
+            <a:r>
+              <a:t>Идеята: алгоритъмът (отстъпката) е отделен от контекста (Checkout) и може да се сменя.</a:t>
+            </a:r>
+          </a:p>
+          <a:p>
+            <a:r>
+              <a:t>Без делегати се постига чрез интерфейс IDiscountStrategy с метод Apply() — по-verbose.</a:t>
+            </a:r>
+          </a:p>
+          <a:p>
+            <a:r>
+              <a:t>С делегати: по-кратко и четимо за прости случаи.</a:t>
+            </a:r>
+          </a:p>
+          <a:p>
+            <a:r>
+              <a:t>Реални употреби: различни алгоритми за сортиране, различни формати за сериализация, различни правила за валидация.</a:t>
+            </a:r>
+          </a:p>
+          <a:p>
+            <a:r>
+              <a:t>Разширение на задачата: добавете сезонна отстъпка, лоялностна програма — само нова Func, без промяна на Checkout.</a:t>
+            </a:r>
+          </a:p>
+          <a:p>
+            <a:r>
+              <a:t>Свържете с принципа Open/Closed: Checkout е затворен за промяна, но отворен за нови стратегии.</a:t>
+            </a:r>
+          </a:p>
+        </p:txBody>
+      </p:sp>
+      <p:sp>
+        <p:nvSpPr>
+          <p:cNvPr id="4" name="Slide Number Placeholder 3"/>
+          <p:cNvSpPr>
+            <a:spLocks noGrp="1"/>
+          </p:cNvSpPr>
+          <p:nvPr>
+            <p:ph type="sldNum" idx="5" sz="quarter"/>
+          </p:nvPr>
+        </p:nvSpPr>
+        <p:spPr/>
+      </p:sp>
+    </p:spTree>
+  </p:cSld>
+  <p:clrMapOvr>
+    <a:masterClrMapping/>
+  </p:clrMapOvr>
+</p:notes>
+</file>
+
+<file path=ppt/notesSlides/notesSlide3.xml><?xml version="1.0" encoding="utf-8"?>
+<p:notes xmlns:a="http://schemas.openxmlformats.org/drawingml/2006/main" xmlns:p="http://schemas.openxmlformats.org/presentationml/2006/main" xmlns:r="http://schemas.openxmlformats.org/officeDocument/2006/relationships">
+  <p:cSld>
+    <p:spTree>
+      <p:nvGrpSpPr>
+        <p:cNvPr id="1" name=""/>
+        <p:cNvGrpSpPr/>
+        <p:nvPr/>
+      </p:nvGrpSpPr>
+      <p:grpSpPr>
+        <a:xfrm>
+          <a:off x="0" y="0"/>
+          <a:ext cx="0" cy="0"/>
+          <a:chOff x="0" y="0"/>
+          <a:chExt cx="0" cy="0"/>
+        </a:xfrm>
+      </p:grpSpPr>
+      <p:sp>
+        <p:nvSpPr>
+          <p:cNvPr id="2" name="Slide Image Placeholder 1"/>
+          <p:cNvSpPr>
+            <a:spLocks noGrp="1"/>
+          </p:cNvSpPr>
+          <p:nvPr>
+            <p:ph type="sldImg" idx="2"/>
+          </p:nvPr>
+        </p:nvSpPr>
+        <p:spPr/>
+      </p:sp>
+      <p:sp>
+        <p:nvSpPr>
+          <p:cNvPr id="3" name="Notes Placeholder 2"/>
+          <p:cNvSpPr>
+            <a:spLocks noGrp="1"/>
+          </p:cNvSpPr>
+          <p:nvPr>
+            <p:ph type="body" idx="3" sz="quarter"/>
+          </p:nvPr>
+        </p:nvSpPr>
+        <p:spPr/>
+        <p:txBody>
+          <a:bodyPr/>
+          <a:lstStyle/>
+          <a:p>
+            <a:r>
+              <a:t>Тема: Делегати и функционално програмиране.</a:t>
+            </a:r>
+          </a:p>
+          <a:p>
+            <a:r>
+              <a:t>Свържете с предишния урок (LINQ): 'Как Where() знае кое условие да провери? — Именно чрез Func и делегати!'</a:t>
+            </a:r>
+          </a:p>
+          <a:p>
+            <a:r>
+              <a:t>Ключова идея: в C# функциите са first-class citizens — могат да се съхраняват в променливи, предават като параметри и връщат от методи.</a:t>
+            </a:r>
+          </a:p>
+          <a:p>
+            <a:r>
+              <a:t>Мотивация: делегатите са основата на events в Windows Forms/WPF — всеки Button.Click е делегат.</a:t>
+            </a:r>
+          </a:p>
+        </p:txBody>
+      </p:sp>
+      <p:sp>
+        <p:nvSpPr>
+          <p:cNvPr id="4" name="Slide Number Placeholder 3"/>
+          <p:cNvSpPr>
+            <a:spLocks noGrp="1"/>
+          </p:cNvSpPr>
+          <p:nvPr>
+            <p:ph type="sldNum" idx="5" sz="quarter"/>
+          </p:nvPr>
+        </p:nvSpPr>
+        <p:spPr/>
+      </p:sp>
+    </p:spTree>
+  </p:cSld>
+  <p:clrMapOvr>
+    <a:masterClrMapping/>
+  </p:clrMapOvr>
+</p:notes>
+</file>
+
+<file path=ppt/notesSlides/notesSlide4.xml><?xml version="1.0" encoding="utf-8"?>
+<p:notes xmlns:a="http://schemas.openxmlformats.org/drawingml/2006/main" xmlns:p="http://schemas.openxmlformats.org/presentationml/2006/main" xmlns:r="http://schemas.openxmlformats.org/officeDocument/2006/relationships">
+  <p:cSld>
+    <p:spTree>
+      <p:nvGrpSpPr>
+        <p:cNvPr id="1" name=""/>
+        <p:cNvGrpSpPr/>
+        <p:nvPr/>
+      </p:nvGrpSpPr>
+      <p:grpSpPr>
+        <a:xfrm>
+          <a:off x="0" y="0"/>
+          <a:ext cx="0" cy="0"/>
+          <a:chOff x="0" y="0"/>
+          <a:chExt cx="0" cy="0"/>
+        </a:xfrm>
+      </p:grpSpPr>
+      <p:sp>
+        <p:nvSpPr>
+          <p:cNvPr id="2" name="Slide Image Placeholder 1"/>
+          <p:cNvSpPr>
+            <a:spLocks noGrp="1"/>
+          </p:cNvSpPr>
+          <p:nvPr>
+            <p:ph type="sldImg" idx="2"/>
+          </p:nvPr>
+        </p:nvSpPr>
+        <p:spPr/>
+      </p:sp>
+      <p:sp>
+        <p:nvSpPr>
+          <p:cNvPr id="3" name="Notes Placeholder 2"/>
+          <p:cNvSpPr>
+            <a:spLocks noGrp="1"/>
+          </p:cNvSpPr>
+          <p:nvPr>
+            <p:ph type="body" idx="3" sz="quarter"/>
+          </p:nvPr>
+        </p:nvSpPr>
+        <p:spPr/>
+        <p:txBody>
+          <a:bodyPr/>
+          <a:lstStyle/>
+          <a:p>
+            <a:r>
+              <a:t>Func&lt;TIn, TOut&gt; = референция към функция с входен тип TIn и изходен TOut.</a:t>
+            </a:r>
+          </a:p>
+          <a:p>
+            <a:r>
+              <a:t>Диаграмата показва: Func&lt;int, string&gt; — приема int, връща string.</a:t>
+            </a:r>
+          </a:p>
+          <a:p>
+            <a:r>
+              <a:t>Аналогия с математика: f: ℤ → ℝ е функция. Func&lt;int, double&gt; е същото в C#.</a:t>
+            </a:r>
+          </a:p>
+          <a:p>
+            <a:r>
+              <a:t>Последният типов параметър ВИНАГИ е изходният тип. Func&lt;int, int, string&gt; = два int-а → string.</a:t>
+            </a:r>
+          </a:p>
+          <a:p>
+            <a:r>
+              <a:t>Важно: Func може да се инициализира с: 1) ламбда, 2) анонимен метод, 3) именован метод.</a:t>
+            </a:r>
+          </a:p>
+        </p:txBody>
+      </p:sp>
+      <p:sp>
+        <p:nvSpPr>
+          <p:cNvPr id="4" name="Slide Number Placeholder 3"/>
+          <p:cNvSpPr>
+            <a:spLocks noGrp="1"/>
+          </p:cNvSpPr>
+          <p:nvPr>
+            <p:ph type="sldNum" idx="5" sz="quarter"/>
+          </p:nvPr>
+        </p:nvSpPr>
+        <p:spPr/>
+      </p:sp>
+    </p:spTree>
+  </p:cSld>
+  <p:clrMapOvr>
+    <a:masterClrMapping/>
+  </p:clrMapOvr>
+</p:notes>
+</file>
+
+<file path=ppt/notesSlides/notesSlide5.xml><?xml version="1.0" encoding="utf-8"?>
+<p:notes xmlns:a="http://schemas.openxmlformats.org/drawingml/2006/main" xmlns:p="http://schemas.openxmlformats.org/presentationml/2006/main" xmlns:r="http://schemas.openxmlformats.org/officeDocument/2006/relationships">
+  <p:cSld>
+    <p:spTree>
+      <p:nvGrpSpPr>
+        <p:cNvPr id="1" name=""/>
+        <p:cNvGrpSpPr/>
+        <p:nvPr/>
+      </p:nvGrpSpPr>
+      <p:grpSpPr>
+        <a:xfrm>
+          <a:off x="0" y="0"/>
+          <a:ext cx="0" cy="0"/>
+          <a:chOff x="0" y="0"/>
+          <a:chExt cx="0" cy="0"/>
+        </a:xfrm>
+      </p:grpSpPr>
+      <p:sp>
+        <p:nvSpPr>
+          <p:cNvPr id="2" name="Slide Image Placeholder 1"/>
+          <p:cNvSpPr>
+            <a:spLocks noGrp="1"/>
+          </p:cNvSpPr>
+          <p:nvPr>
+            <p:ph type="sldImg" idx="2"/>
+          </p:nvPr>
+        </p:nvSpPr>
+        <p:spPr/>
+      </p:sp>
+      <p:sp>
+        <p:nvSpPr>
+          <p:cNvPr id="3" name="Notes Placeholder 2"/>
+          <p:cNvSpPr>
+            <a:spLocks noGrp="1"/>
+          </p:cNvSpPr>
+          <p:nvPr>
+            <p:ph type="body" idx="3" sz="quarter"/>
+          </p:nvPr>
+        </p:nvSpPr>
+        <p:spPr/>
+        <p:txBody>
+          <a:bodyPr/>
+          <a:lstStyle/>
+          <a:p>
+            <a:r>
+              <a:t>Action&lt;T&gt; = функция без return стойност (void).</a:t>
+            </a:r>
+          </a:p>
+          <a:p>
+            <a:r>
+              <a:t>Типична употреба: logging, print, изпращане на email, запис в база.</a:t>
+            </a:r>
+          </a:p>
+          <a:p>
+            <a:r>
+              <a:t>Action без параметри: Action doSomething = () =&gt; Console.WriteLine('Hello');</a:t>
+            </a:r>
+          </a:p>
+          <a:p>
+            <a:r>
+              <a:t>Разлика: Func&lt;string&gt; НЕ е същото като Action&lt;string&gt;! Func&lt;string&gt; приема нищо и ВРЪЩА string. Action&lt;string&gt; ПРИЕМА string и не връща нищо.</a:t>
+            </a:r>
+          </a:p>
+          <a:p>
+            <a:r>
+              <a:t>Задайте въпрос: 'Кога бихте използвали Action вместо Func?'</a:t>
+            </a:r>
+          </a:p>
+        </p:txBody>
+      </p:sp>
+      <p:sp>
+        <p:nvSpPr>
+          <p:cNvPr id="4" name="Slide Number Placeholder 3"/>
+          <p:cNvSpPr>
+            <a:spLocks noGrp="1"/>
+          </p:cNvSpPr>
+          <p:nvPr>
+            <p:ph type="sldNum" idx="5" sz="quarter"/>
+          </p:nvPr>
+        </p:nvSpPr>
+        <p:spPr/>
+      </p:sp>
+    </p:spTree>
+  </p:cSld>
+  <p:clrMapOvr>
+    <a:masterClrMapping/>
+  </p:clrMapOvr>
+</p:notes>
+</file>
+
+<file path=ppt/notesSlides/notesSlide6.xml><?xml version="1.0" encoding="utf-8"?>
+<p:notes xmlns:a="http://schemas.openxmlformats.org/drawingml/2006/main" xmlns:p="http://schemas.openxmlformats.org/presentationml/2006/main" xmlns:r="http://schemas.openxmlformats.org/officeDocument/2006/relationships">
+  <p:cSld>
+    <p:spTree>
+      <p:nvGrpSpPr>
+        <p:cNvPr id="1" name=""/>
+        <p:cNvGrpSpPr/>
+        <p:nvPr/>
+      </p:nvGrpSpPr>
+      <p:grpSpPr>
+        <a:xfrm>
+          <a:off x="0" y="0"/>
+          <a:ext cx="0" cy="0"/>
+          <a:chOff x="0" y="0"/>
+          <a:chExt cx="0" cy="0"/>
+        </a:xfrm>
+      </p:grpSpPr>
+      <p:sp>
+        <p:nvSpPr>
+          <p:cNvPr id="2" name="Slide Image Placeholder 1"/>
+          <p:cNvSpPr>
+            <a:spLocks noGrp="1"/>
+          </p:cNvSpPr>
+          <p:nvPr>
+            <p:ph type="sldImg" idx="2"/>
+          </p:nvPr>
+        </p:nvSpPr>
+        <p:spPr/>
+      </p:sp>
+      <p:sp>
+        <p:nvSpPr>
+          <p:cNvPr id="3" name="Notes Placeholder 2"/>
+          <p:cNvSpPr>
+            <a:spLocks noGrp="1"/>
+          </p:cNvSpPr>
+          <p:nvPr>
+            <p:ph type="body" idx="3" sz="quarter"/>
+          </p:nvPr>
+        </p:nvSpPr>
+        <p:spPr/>
+        <p:txBody>
+          <a:bodyPr/>
+          <a:lstStyle/>
+          <a:p>
+            <a:r>
+              <a:t>Задача: учениците трябва да използват Func за парсване на числа от низ.</a:t>
+            </a:r>
+          </a:p>
+          <a:p>
+            <a:r>
+              <a:t>Hint: Func&lt;string, int&gt; parser = n =&gt; int.Parse(n);</a:t>
+            </a:r>
+          </a:p>
+          <a:p>
+            <a:r>
+              <a:t>Важното е, че parser може да се предаде на Select() — Select е generic и приема Func!</a:t>
+            </a:r>
+          </a:p>
+          <a:p>
+            <a:r>
+              <a:t>Дайте 5 минути за самостоятелна работа преди решението.</a:t>
+            </a:r>
+          </a:p>
+        </p:txBody>
+      </p:sp>
+      <p:sp>
+        <p:nvSpPr>
+          <p:cNvPr id="4" name="Slide Number Placeholder 3"/>
+          <p:cNvSpPr>
+            <a:spLocks noGrp="1"/>
+          </p:cNvSpPr>
+          <p:nvPr>
+            <p:ph type="sldNum" idx="5" sz="quarter"/>
+          </p:nvPr>
+        </p:nvSpPr>
+        <p:spPr/>
+      </p:sp>
+    </p:spTree>
+  </p:cSld>
+  <p:clrMapOvr>
+    <a:masterClrMapping/>
+  </p:clrMapOvr>
+</p:notes>
+</file>
+
+<file path=ppt/notesSlides/notesSlide7.xml><?xml version="1.0" encoding="utf-8"?>
+<p:notes xmlns:a="http://schemas.openxmlformats.org/drawingml/2006/main" xmlns:p="http://schemas.openxmlformats.org/presentationml/2006/main" xmlns:r="http://schemas.openxmlformats.org/officeDocument/2006/relationships">
+  <p:cSld>
+    <p:spTree>
+      <p:nvGrpSpPr>
+        <p:cNvPr id="1" name=""/>
+        <p:cNvGrpSpPr/>
+        <p:nvPr/>
+      </p:nvGrpSpPr>
+      <p:grpSpPr>
+        <a:xfrm>
+          <a:off x="0" y="0"/>
+          <a:ext cx="0" cy="0"/>
+          <a:chOff x="0" y="0"/>
+          <a:chExt cx="0" cy="0"/>
+        </a:xfrm>
+      </p:grpSpPr>
+      <p:sp>
+        <p:nvSpPr>
+          <p:cNvPr id="2" name="Slide Image Placeholder 1"/>
+          <p:cNvSpPr>
+            <a:spLocks noGrp="1"/>
+          </p:cNvSpPr>
+          <p:nvPr>
+            <p:ph type="sldImg" idx="2"/>
+          </p:nvPr>
+        </p:nvSpPr>
+        <p:spPr/>
+      </p:sp>
+      <p:sp>
+        <p:nvSpPr>
+          <p:cNvPr id="3" name="Notes Placeholder 2"/>
+          <p:cNvSpPr>
+            <a:spLocks noGrp="1"/>
+          </p:cNvSpPr>
+          <p:nvPr>
+            <p:ph type="body" idx="3" sz="quarter"/>
+          </p:nvPr>
+        </p:nvSpPr>
+        <p:spPr/>
+        <p:txBody>
+          <a:bodyPr/>
+          <a:lstStyle/>
+          <a:p>
+            <a:r>
+              <a:t>Делегатите са типове в C# — дефинират сигнатура (параметри + return тип).</a:t>
+            </a:r>
+          </a:p>
+          <a:p>
+            <a:r>
+              <a:t>Func и Action са вградени делегати — не е нужно да дефинираме собствени за стандартни случаи.</a:t>
+            </a:r>
+          </a:p>
+          <a:p>
+            <a:r>
+              <a:t>Кога се налагат собствени делегати: повече от 15 параметъра (рядко) или по-описателно име.</a:t>
+            </a:r>
+          </a:p>
+          <a:p>
+            <a:r>
+              <a:t>Примерен делегат: delegate int Operation(int a, int b);</a:t>
+            </a:r>
+          </a:p>
+          <a:p>
+            <a:r>
+              <a:t>Историческа бележка: делегатите са от C# 1.0, Func/Action са от C# 3.0 (.NET 3.5).</a:t>
+            </a:r>
+          </a:p>
+        </p:txBody>
+      </p:sp>
+      <p:sp>
+        <p:nvSpPr>
+          <p:cNvPr id="4" name="Slide Number Placeholder 3"/>
+          <p:cNvSpPr>
+            <a:spLocks noGrp="1"/>
+          </p:cNvSpPr>
+          <p:nvPr>
+            <p:ph type="sldNum" idx="5" sz="quarter"/>
+          </p:nvPr>
+        </p:nvSpPr>
+        <p:spPr/>
+      </p:sp>
+    </p:spTree>
+  </p:cSld>
+  <p:clrMapOvr>
+    <a:masterClrMapping/>
+  </p:clrMapOvr>
+</p:notes>
+</file>
+
+<file path=ppt/notesSlides/notesSlide8.xml><?xml version="1.0" encoding="utf-8"?>
+<p:notes xmlns:a="http://schemas.openxmlformats.org/drawingml/2006/main" xmlns:p="http://schemas.openxmlformats.org/presentationml/2006/main" xmlns:r="http://schemas.openxmlformats.org/officeDocument/2006/relationships">
+  <p:cSld>
+    <p:spTree>
+      <p:nvGrpSpPr>
+        <p:cNvPr id="1" name=""/>
+        <p:cNvGrpSpPr/>
+        <p:nvPr/>
+      </p:nvGrpSpPr>
+      <p:grpSpPr>
+        <a:xfrm>
+          <a:off x="0" y="0"/>
+          <a:ext cx="0" cy="0"/>
+          <a:chOff x="0" y="0"/>
+          <a:chExt cx="0" cy="0"/>
+        </a:xfrm>
+      </p:grpSpPr>
+      <p:sp>
+        <p:nvSpPr>
+          <p:cNvPr id="2" name="Slide Image Placeholder 1"/>
+          <p:cNvSpPr>
+            <a:spLocks noGrp="1"/>
+          </p:cNvSpPr>
+          <p:nvPr>
+            <p:ph type="sldImg" idx="2"/>
+          </p:nvPr>
+        </p:nvSpPr>
+        <p:spPr/>
+      </p:sp>
+      <p:sp>
+        <p:nvSpPr>
+          <p:cNvPr id="3" name="Notes Placeholder 2"/>
+          <p:cNvSpPr>
+            <a:spLocks noGrp="1"/>
+          </p:cNvSpPr>
+          <p:nvPr>
+            <p:ph type="body" idx="3" sz="quarter"/>
+          </p:nvPr>
+        </p:nvSpPr>
+        <p:spPr/>
+        <p:txBody>
+          <a:bodyPr/>
+          <a:lstStyle/>
+          <a:p>
+            <a:r>
+              <a:t>Обяснете: parser е Func&lt;string, int&gt; — приема string, връща int.</a:t>
+            </a:r>
+          </a:p>
+          <a:p>
+            <a:r>
+              <a:t>Select(parser) е еквивалентно на Select(n =&gt; int.Parse(n)).</a:t>
+            </a:r>
+          </a:p>
+          <a:p>
+            <a:r>
+              <a:t>Предимство: когато логиката е по-сложна от едно извикване, именуването подобрява четимостта.</a:t>
+            </a:r>
+          </a:p>
+        </p:txBody>
+      </p:sp>
+      <p:sp>
+        <p:nvSpPr>
+          <p:cNvPr id="4" name="Slide Number Placeholder 3"/>
+          <p:cNvSpPr>
+            <a:spLocks noGrp="1"/>
+          </p:cNvSpPr>
+          <p:nvPr>
+            <p:ph type="sldNum" idx="5" sz="quarter"/>
+          </p:nvPr>
+        </p:nvSpPr>
+        <p:spPr/>
+      </p:sp>
+    </p:spTree>
+  </p:cSld>
+  <p:clrMapOvr>
+    <a:masterClrMapping/>
+  </p:clrMapOvr>
+</p:notes>
+</file>
+
+<file path=ppt/notesSlides/notesSlide9.xml><?xml version="1.0" encoding="utf-8"?>
+<p:notes xmlns:a="http://schemas.openxmlformats.org/drawingml/2006/main" xmlns:p="http://schemas.openxmlformats.org/presentationml/2006/main" xmlns:r="http://schemas.openxmlformats.org/officeDocument/2006/relationships">
+  <p:cSld>
+    <p:spTree>
+      <p:nvGrpSpPr>
+        <p:cNvPr id="1" name=""/>
+        <p:cNvGrpSpPr/>
+        <p:nvPr/>
+      </p:nvGrpSpPr>
+      <p:grpSpPr>
+        <a:xfrm>
+          <a:off x="0" y="0"/>
+          <a:ext cx="0" cy="0"/>
+          <a:chOff x="0" y="0"/>
+          <a:chExt cx="0" cy="0"/>
+        </a:xfrm>
+      </p:grpSpPr>
+      <p:sp>
+        <p:nvSpPr>
+          <p:cNvPr id="2" name="Slide Image Placeholder 1"/>
+          <p:cNvSpPr>
+            <a:spLocks noGrp="1"/>
+          </p:cNvSpPr>
+          <p:nvPr>
+            <p:ph type="sldImg" idx="2"/>
+          </p:nvPr>
+        </p:nvSpPr>
+        <p:spPr/>
+      </p:sp>
+      <p:sp>
+        <p:nvSpPr>
+          <p:cNvPr id="3" name="Notes Placeholder 2"/>
+          <p:cNvSpPr>
+            <a:spLocks noGrp="1"/>
+          </p:cNvSpPr>
+          <p:nvPr>
+            <p:ph type="body" idx="3" sz="quarter"/>
+          </p:nvPr>
+        </p:nvSpPr>
+        <p:spPr/>
+        <p:txBody>
+          <a:bodyPr/>
+          <a:lstStyle/>
+          <a:p>
+            <a:r>
+              <a:t>Checker Func&lt;string, bool&gt;: n[0] е първата буква, ToUpper()[0] е същата буква с главни.</a:t>
+            </a:r>
+          </a:p>
+          <a:p>
+            <a:r>
+              <a:t>Ако са равни — думата вече започва с главна буква.</a:t>
+            </a:r>
+          </a:p>
+          <a:p>
+            <a:r>
+              <a:t>ForEach е метод на List&lt;T&gt; — не е LINQ, а метод на самия List.</a:t>
+            </a:r>
+          </a:p>
+          <a:p>
+            <a:r>
+              <a:t>Алтернатива: Console.WriteLine(string.Join('\n', words.Where(checker)));</a:t>
+            </a:r>
+          </a:p>
+        </p:txBody>
+      </p:sp>
+      <p:sp>
+        <p:nvSpPr>
+          <p:cNvPr id="4" name="Slide Number Placeholder 3"/>
+          <p:cNvSpPr>
+            <a:spLocks noGrp="1"/>
+          </p:cNvSpPr>
+          <p:nvPr>
+            <p:ph type="sldNum" idx="5" sz="quarter"/>
+          </p:nvPr>
+        </p:nvSpPr>
+        <p:spPr/>
+      </p:sp>
+    </p:spTree>
   </p:cSld>
   <p:clrMapOvr>
     <a:masterClrMapping/>
@@ -12248,6 +14268,2179 @@
 </p:sld>
 </file>
 
+<file path=ppt/slides/slide21.xml><?xml version="1.0" encoding="utf-8"?>
+<p:sld xmlns:a="http://schemas.openxmlformats.org/drawingml/2006/main" xmlns:p="http://schemas.openxmlformats.org/presentationml/2006/main" xmlns:r="http://schemas.openxmlformats.org/officeDocument/2006/relationships">
+  <p:cSld>
+    <p:bg>
+      <p:bgPr>
+        <a:solidFill>
+          <a:srgbClr val="FFFFFF"/>
+        </a:solidFill>
+        <a:effectLst/>
+      </p:bgPr>
+    </p:bg>
+    <p:spTree>
+      <p:nvGrpSpPr>
+        <p:cNvPr id="1" name=""/>
+        <p:cNvGrpSpPr/>
+        <p:nvPr/>
+      </p:nvGrpSpPr>
+      <p:grpSpPr/>
+      <p:sp>
+        <p:nvSpPr>
+          <p:cNvPr id="2" name="TextBox 1"/>
+          <p:cNvSpPr txBox="1"/>
+          <p:nvPr/>
+        </p:nvSpPr>
+        <p:spPr>
+          <a:xfrm>
+            <a:off x="457200" y="274320"/>
+            <a:ext cx="11274552" cy="777240"/>
+          </a:xfrm>
+          <a:prstGeom prst="rect">
+            <a:avLst/>
+          </a:prstGeom>
+          <a:solidFill>
+            <a:srgbClr val="1F497D"/>
+          </a:solidFill>
+        </p:spPr>
+        <p:txBody>
+          <a:bodyPr wrap="square">
+            <a:spAutoFit/>
+          </a:bodyPr>
+          <a:lstStyle/>
+          <a:p>
+            <a:r>
+              <a:rPr sz="3400" b="1">
+                <a:solidFill>
+                  <a:srgbClr val="FFFFFF"/>
+                </a:solidFill>
+              </a:rPr>
+              <a:t>Защо делегати? — Мотивация</a:t>
+            </a:r>
+          </a:p>
+        </p:txBody>
+      </p:sp>
+      <p:sp>
+        <p:nvSpPr>
+          <p:cNvPr id="3" name="TextBox 2"/>
+          <p:cNvSpPr txBox="1"/>
+          <p:nvPr/>
+        </p:nvSpPr>
+        <p:spPr>
+          <a:xfrm>
+            <a:off x="457200" y="1170432"/>
+            <a:ext cx="11274552" cy="594360"/>
+          </a:xfrm>
+          <a:prstGeom prst="rect">
+            <a:avLst/>
+          </a:prstGeom>
+          <a:noFill/>
+        </p:spPr>
+        <p:txBody>
+          <a:bodyPr wrap="square">
+            <a:spAutoFit/>
+          </a:bodyPr>
+          <a:lstStyle/>
+          <a:p>
+            <a:r>
+              <a:rPr sz="1900">
+                <a:solidFill>
+                  <a:srgbClr val="1F1F1F"/>
+                </a:solidFill>
+              </a:rPr>
+              <a:t>Проблем: метод, чието поведение трябва да е различно при различни извиквания.</a:t>
+            </a:r>
+          </a:p>
+        </p:txBody>
+      </p:sp>
+      <p:sp>
+        <p:nvSpPr>
+          <p:cNvPr id="4" name="TextBox 3"/>
+          <p:cNvSpPr txBox="1"/>
+          <p:nvPr/>
+        </p:nvSpPr>
+        <p:spPr>
+          <a:xfrm>
+            <a:off x="457200" y="1874519"/>
+            <a:ext cx="5394960" cy="4114800"/>
+          </a:xfrm>
+          <a:prstGeom prst="rect">
+            <a:avLst/>
+          </a:prstGeom>
+          <a:solidFill>
+            <a:srgbClr val="F0F0F0"/>
+          </a:solidFill>
+        </p:spPr>
+        <p:txBody>
+          <a:bodyPr wrap="none">
+            <a:spAutoFit/>
+          </a:bodyPr>
+          <a:lstStyle/>
+          <a:p>
+            <a:r>
+              <a:rPr sz="1600">
+                <a:solidFill>
+                  <a:srgbClr val="008000"/>
+                </a:solidFill>
+                <a:latin typeface="Courier New"/>
+              </a:rPr>
+              <a:t>// БЕЗ делегати — дублиран код</a:t>
+            </a:r>
+          </a:p>
+          <a:p>
+            <a:r>
+              <a:rPr sz="1600">
+                <a:latin typeface="Courier New"/>
+              </a:rPr>
+              <a:t>void PrintAsc(int[] arr)</a:t>
+            </a:r>
+          </a:p>
+          <a:p>
+            <a:r>
+              <a:rPr sz="1600">
+                <a:latin typeface="Courier New"/>
+              </a:rPr>
+              <a:t>{</a:t>
+            </a:r>
+          </a:p>
+          <a:p>
+            <a:r>
+              <a:rPr sz="1600">
+                <a:latin typeface="Courier New"/>
+              </a:rPr>
+              <a:t>    foreach (var x in arr.OrderBy(x =&gt; x))</a:t>
+            </a:r>
+          </a:p>
+          <a:p>
+            <a:r>
+              <a:rPr sz="1600">
+                <a:latin typeface="Courier New"/>
+              </a:rPr>
+              <a:t>        Console.WriteLine(x);</a:t>
+            </a:r>
+          </a:p>
+          <a:p>
+            <a:r>
+              <a:rPr sz="1600">
+                <a:latin typeface="Courier New"/>
+              </a:rPr>
+              <a:t>}</a:t>
+            </a:r>
+          </a:p>
+          <a:p>
+            <a:r>
+              <a:rPr sz="1600">
+                <a:latin typeface="Courier New"/>
+              </a:rPr>
+              <a:t>void PrintDesc(int[] arr)</a:t>
+            </a:r>
+          </a:p>
+          <a:p>
+            <a:r>
+              <a:rPr sz="1600">
+                <a:latin typeface="Courier New"/>
+              </a:rPr>
+              <a:t>{</a:t>
+            </a:r>
+          </a:p>
+          <a:p>
+            <a:r>
+              <a:rPr sz="1600">
+                <a:latin typeface="Courier New"/>
+              </a:rPr>
+              <a:t>    foreach (var x in arr.OrderByDescending(x =&gt; x))</a:t>
+            </a:r>
+          </a:p>
+          <a:p>
+            <a:r>
+              <a:rPr sz="1600">
+                <a:latin typeface="Courier New"/>
+              </a:rPr>
+              <a:t>        Console.WriteLine(x);</a:t>
+            </a:r>
+          </a:p>
+          <a:p>
+            <a:r>
+              <a:rPr sz="1600">
+                <a:latin typeface="Courier New"/>
+              </a:rPr>
+              <a:t>}</a:t>
+            </a:r>
+          </a:p>
+        </p:txBody>
+      </p:sp>
+      <p:sp>
+        <p:nvSpPr>
+          <p:cNvPr id="5" name="TextBox 4"/>
+          <p:cNvSpPr txBox="1"/>
+          <p:nvPr/>
+        </p:nvSpPr>
+        <p:spPr>
+          <a:xfrm>
+            <a:off x="5852160" y="1874519"/>
+            <a:ext cx="5394960" cy="4114800"/>
+          </a:xfrm>
+          <a:prstGeom prst="rect">
+            <a:avLst/>
+          </a:prstGeom>
+          <a:solidFill>
+            <a:srgbClr val="F0F0F0"/>
+          </a:solidFill>
+        </p:spPr>
+        <p:txBody>
+          <a:bodyPr wrap="none">
+            <a:spAutoFit/>
+          </a:bodyPr>
+          <a:lstStyle/>
+          <a:p>
+            <a:r>
+              <a:rPr sz="1600">
+                <a:solidFill>
+                  <a:srgbClr val="008000"/>
+                </a:solidFill>
+                <a:latin typeface="Courier New"/>
+              </a:rPr>
+              <a:t>// С делегат — един гъвкав метод</a:t>
+            </a:r>
+          </a:p>
+          <a:p>
+            <a:r>
+              <a:rPr sz="1600">
+                <a:latin typeface="Courier New"/>
+              </a:rPr>
+              <a:t>void Print(int[] arr, </a:t>
+            </a:r>
+            <a:r>
+              <a:rPr sz="1600">
+                <a:solidFill>
+                  <a:srgbClr val="00B0F0"/>
+                </a:solidFill>
+                <a:latin typeface="Courier New"/>
+              </a:rPr>
+              <a:t>Func&lt;int,int&gt;</a:t>
+            </a:r>
+            <a:r>
+              <a:rPr sz="1600">
+                <a:latin typeface="Courier New"/>
+              </a:rPr>
+              <a:t> key)</a:t>
+            </a:r>
+          </a:p>
+          <a:p>
+            <a:r>
+              <a:rPr sz="1600">
+                <a:latin typeface="Courier New"/>
+              </a:rPr>
+              <a:t>{</a:t>
+            </a:r>
+          </a:p>
+          <a:p>
+            <a:r>
+              <a:rPr sz="1600">
+                <a:latin typeface="Courier New"/>
+              </a:rPr>
+              <a:t>    foreach (var x in arr.</a:t>
+            </a:r>
+            <a:r>
+              <a:rPr sz="1600">
+                <a:solidFill>
+                  <a:srgbClr val="00B0F0"/>
+                </a:solidFill>
+                <a:latin typeface="Courier New"/>
+              </a:rPr>
+              <a:t>OrderBy</a:t>
+            </a:r>
+            <a:r>
+              <a:rPr sz="1600">
+                <a:latin typeface="Courier New"/>
+              </a:rPr>
+              <a:t>(key))</a:t>
+            </a:r>
+          </a:p>
+          <a:p>
+            <a:r>
+              <a:rPr sz="1600">
+                <a:latin typeface="Courier New"/>
+              </a:rPr>
+              <a:t>        Console.WriteLine(x);</a:t>
+            </a:r>
+          </a:p>
+          <a:p>
+            <a:r>
+              <a:rPr sz="1600">
+                <a:latin typeface="Courier New"/>
+              </a:rPr>
+              <a:t>}</a:t>
+            </a:r>
+          </a:p>
+          <a:p>
+            <a:r>
+              <a:rPr sz="1600">
+                <a:latin typeface="Courier New"/>
+              </a:rPr>
+              <a:t/>
+            </a:r>
+          </a:p>
+          <a:p>
+            <a:r>
+              <a:rPr sz="1600">
+                <a:solidFill>
+                  <a:srgbClr val="008000"/>
+                </a:solidFill>
+                <a:latin typeface="Courier New"/>
+              </a:rPr>
+              <a:t>// Извикваме с различна логика:</a:t>
+            </a:r>
+          </a:p>
+          <a:p>
+            <a:r>
+              <a:rPr sz="1600">
+                <a:latin typeface="Courier New"/>
+              </a:rPr>
+              <a:t>Print(arr, x =&gt; x);        // нарастващо</a:t>
+            </a:r>
+          </a:p>
+          <a:p>
+            <a:r>
+              <a:rPr sz="1600">
+                <a:latin typeface="Courier New"/>
+              </a:rPr>
+              <a:t>Print(arr, x =&gt; -x);       // намаляващо</a:t>
+            </a:r>
+          </a:p>
+          <a:p>
+            <a:r>
+              <a:rPr sz="1600">
+                <a:latin typeface="Courier New"/>
+              </a:rPr>
+              <a:t>Print(arr, x =&gt; x % 10);   // по последна цифра</a:t>
+            </a:r>
+          </a:p>
+        </p:txBody>
+      </p:sp>
+    </p:spTree>
+  </p:cSld>
+  <p:clrMapOvr>
+    <a:masterClrMapping/>
+  </p:clrMapOvr>
+</p:sld>
+</file>
+
+<file path=ppt/slides/slide22.xml><?xml version="1.0" encoding="utf-8"?>
+<p:sld xmlns:a="http://schemas.openxmlformats.org/drawingml/2006/main" xmlns:p="http://schemas.openxmlformats.org/presentationml/2006/main" xmlns:r="http://schemas.openxmlformats.org/officeDocument/2006/relationships">
+  <p:cSld>
+    <p:bg>
+      <p:bgPr>
+        <a:solidFill>
+          <a:srgbClr val="FFFFFF"/>
+        </a:solidFill>
+        <a:effectLst/>
+      </p:bgPr>
+    </p:bg>
+    <p:spTree>
+      <p:nvGrpSpPr>
+        <p:cNvPr id="1" name=""/>
+        <p:cNvGrpSpPr/>
+        <p:nvPr/>
+      </p:nvGrpSpPr>
+      <p:grpSpPr/>
+      <p:sp>
+        <p:nvSpPr>
+          <p:cNvPr id="2" name="TextBox 1"/>
+          <p:cNvSpPr txBox="1"/>
+          <p:nvPr/>
+        </p:nvSpPr>
+        <p:spPr>
+          <a:xfrm>
+            <a:off x="457200" y="274320"/>
+            <a:ext cx="11274552" cy="777240"/>
+          </a:xfrm>
+          <a:prstGeom prst="rect">
+            <a:avLst/>
+          </a:prstGeom>
+          <a:solidFill>
+            <a:srgbClr val="1F497D"/>
+          </a:solidFill>
+        </p:spPr>
+        <p:txBody>
+          <a:bodyPr wrap="square">
+            <a:spAutoFit/>
+          </a:bodyPr>
+          <a:lstStyle/>
+          <a:p>
+            <a:r>
+              <a:rPr sz="3400" b="1">
+                <a:solidFill>
+                  <a:srgbClr val="FFFFFF"/>
+                </a:solidFill>
+              </a:rPr>
+              <a:t>Func с множество параметри</a:t>
+            </a:r>
+          </a:p>
+        </p:txBody>
+      </p:sp>
+      <p:sp>
+        <p:nvSpPr>
+          <p:cNvPr id="3" name="TextBox 2"/>
+          <p:cNvSpPr txBox="1"/>
+          <p:nvPr/>
+        </p:nvSpPr>
+        <p:spPr>
+          <a:xfrm>
+            <a:off x="457200" y="1170432"/>
+            <a:ext cx="11274552" cy="594360"/>
+          </a:xfrm>
+          <a:prstGeom prst="rect">
+            <a:avLst/>
+          </a:prstGeom>
+          <a:noFill/>
+        </p:spPr>
+        <p:txBody>
+          <a:bodyPr wrap="square">
+            <a:spAutoFit/>
+          </a:bodyPr>
+          <a:lstStyle/>
+          <a:p>
+            <a:r>
+              <a:rPr sz="1900">
+                <a:solidFill>
+                  <a:srgbClr val="1F1F1F"/>
+                </a:solidFill>
+              </a:rPr>
+              <a:t>Func може да приема до 15 входни параметъра. Последният тип ВИНАГИ е изходният.</a:t>
+            </a:r>
+          </a:p>
+        </p:txBody>
+      </p:sp>
+      <p:sp>
+        <p:nvSpPr>
+          <p:cNvPr id="4" name="TextBox 3"/>
+          <p:cNvSpPr txBox="1"/>
+          <p:nvPr/>
+        </p:nvSpPr>
+        <p:spPr>
+          <a:xfrm>
+            <a:off x="457200" y="1828800"/>
+            <a:ext cx="11274552" cy="4206240"/>
+          </a:xfrm>
+          <a:prstGeom prst="rect">
+            <a:avLst/>
+          </a:prstGeom>
+          <a:solidFill>
+            <a:srgbClr val="F0F0F0"/>
+          </a:solidFill>
+        </p:spPr>
+        <p:txBody>
+          <a:bodyPr wrap="none">
+            <a:spAutoFit/>
+          </a:bodyPr>
+          <a:lstStyle/>
+          <a:p>
+            <a:r>
+              <a:rPr sz="1700">
+                <a:solidFill>
+                  <a:srgbClr val="008000"/>
+                </a:solidFill>
+                <a:latin typeface="Courier New"/>
+              </a:rPr>
+              <a:t>// Func&lt;TIn, TOut&gt;  — 1 вход, 1 изход</a:t>
+            </a:r>
+          </a:p>
+          <a:p>
+            <a:r>
+              <a:rPr sz="1700">
+                <a:latin typeface="Courier New"/>
+              </a:rPr>
+              <a:t>Func&lt;int, string&gt; toString = n =&gt; n.</a:t>
+            </a:r>
+            <a:r>
+              <a:rPr sz="1700">
+                <a:solidFill>
+                  <a:srgbClr val="00B0F0"/>
+                </a:solidFill>
+                <a:latin typeface="Courier New"/>
+              </a:rPr>
+              <a:t>ToString</a:t>
+            </a:r>
+            <a:r>
+              <a:rPr sz="1700">
+                <a:latin typeface="Courier New"/>
+              </a:rPr>
+              <a:t>();</a:t>
+            </a:r>
+          </a:p>
+          <a:p>
+            <a:r>
+              <a:rPr sz="1700">
+                <a:latin typeface="Courier New"/>
+              </a:rPr>
+              <a:t/>
+            </a:r>
+          </a:p>
+          <a:p>
+            <a:r>
+              <a:rPr sz="1700">
+                <a:solidFill>
+                  <a:srgbClr val="008000"/>
+                </a:solidFill>
+                <a:latin typeface="Courier New"/>
+              </a:rPr>
+              <a:t>// Func&lt;T1, T2, TOut&gt;  — 2 входа, 1 изход</a:t>
+            </a:r>
+          </a:p>
+          <a:p>
+            <a:r>
+              <a:rPr sz="1700">
+                <a:latin typeface="Courier New"/>
+              </a:rPr>
+              <a:t>Func&lt;int, int, int&gt; add      = (a, b) =&gt; a + b;</a:t>
+            </a:r>
+          </a:p>
+          <a:p>
+            <a:r>
+              <a:rPr sz="1700">
+                <a:latin typeface="Courier New"/>
+              </a:rPr>
+              <a:t>Func&lt;int, int, int&gt; multiply = (a, b) =&gt; a * b;</a:t>
+            </a:r>
+          </a:p>
+          <a:p>
+            <a:r>
+              <a:rPr sz="1700">
+                <a:latin typeface="Courier New"/>
+              </a:rPr>
+              <a:t>Func&lt;int, int, int&gt; power    = (base_, exp) =&gt; (int)Math.</a:t>
+            </a:r>
+            <a:r>
+              <a:rPr sz="1700">
+                <a:solidFill>
+                  <a:srgbClr val="00B0F0"/>
+                </a:solidFill>
+                <a:latin typeface="Courier New"/>
+              </a:rPr>
+              <a:t>Pow</a:t>
+            </a:r>
+            <a:r>
+              <a:rPr sz="1700">
+                <a:latin typeface="Courier New"/>
+              </a:rPr>
+              <a:t>(base_, exp);</a:t>
+            </a:r>
+          </a:p>
+          <a:p>
+            <a:r>
+              <a:rPr sz="1700">
+                <a:latin typeface="Courier New"/>
+              </a:rPr>
+              <a:t/>
+            </a:r>
+          </a:p>
+          <a:p>
+            <a:r>
+              <a:rPr sz="1700">
+                <a:latin typeface="Courier New"/>
+              </a:rPr>
+              <a:t>Console.</a:t>
+            </a:r>
+            <a:r>
+              <a:rPr sz="1700">
+                <a:solidFill>
+                  <a:srgbClr val="00B0F0"/>
+                </a:solidFill>
+                <a:latin typeface="Courier New"/>
+              </a:rPr>
+              <a:t>WriteLine</a:t>
+            </a:r>
+            <a:r>
+              <a:rPr sz="1700">
+                <a:latin typeface="Courier New"/>
+              </a:rPr>
+              <a:t>(add(3, 4));      </a:t>
+            </a:r>
+            <a:r>
+              <a:rPr sz="1700">
+                <a:solidFill>
+                  <a:srgbClr val="008000"/>
+                </a:solidFill>
+                <a:latin typeface="Courier New"/>
+              </a:rPr>
+              <a:t>// 7</a:t>
+            </a:r>
+          </a:p>
+          <a:p>
+            <a:r>
+              <a:rPr sz="1700">
+                <a:latin typeface="Courier New"/>
+              </a:rPr>
+              <a:t>Console.</a:t>
+            </a:r>
+            <a:r>
+              <a:rPr sz="1700">
+                <a:solidFill>
+                  <a:srgbClr val="00B0F0"/>
+                </a:solidFill>
+                <a:latin typeface="Courier New"/>
+              </a:rPr>
+              <a:t>WriteLine</a:t>
+            </a:r>
+            <a:r>
+              <a:rPr sz="1700">
+                <a:latin typeface="Courier New"/>
+              </a:rPr>
+              <a:t>(multiply(3, 4)); </a:t>
+            </a:r>
+            <a:r>
+              <a:rPr sz="1700">
+                <a:solidFill>
+                  <a:srgbClr val="008000"/>
+                </a:solidFill>
+                <a:latin typeface="Courier New"/>
+              </a:rPr>
+              <a:t>// 12</a:t>
+            </a:r>
+          </a:p>
+          <a:p>
+            <a:r>
+              <a:rPr sz="1700">
+                <a:latin typeface="Courier New"/>
+              </a:rPr>
+              <a:t>Console.</a:t>
+            </a:r>
+            <a:r>
+              <a:rPr sz="1700">
+                <a:solidFill>
+                  <a:srgbClr val="00B0F0"/>
+                </a:solidFill>
+                <a:latin typeface="Courier New"/>
+              </a:rPr>
+              <a:t>WriteLine</a:t>
+            </a:r>
+            <a:r>
+              <a:rPr sz="1700">
+                <a:latin typeface="Courier New"/>
+              </a:rPr>
+              <a:t>(power(2, 8));    </a:t>
+            </a:r>
+            <a:r>
+              <a:rPr sz="1700">
+                <a:solidFill>
+                  <a:srgbClr val="008000"/>
+                </a:solidFill>
+                <a:latin typeface="Courier New"/>
+              </a:rPr>
+              <a:t>// 256</a:t>
+            </a:r>
+          </a:p>
+          <a:p>
+            <a:r>
+              <a:rPr sz="1700">
+                <a:latin typeface="Courier New"/>
+              </a:rPr>
+              <a:t/>
+            </a:r>
+          </a:p>
+          <a:p>
+            <a:r>
+              <a:rPr sz="1700">
+                <a:solidFill>
+                  <a:srgbClr val="008000"/>
+                </a:solidFill>
+                <a:latin typeface="Courier New"/>
+              </a:rPr>
+              <a:t>// Func&lt;string, string, bool&gt;  — сравняване на низове</a:t>
+            </a:r>
+          </a:p>
+          <a:p>
+            <a:r>
+              <a:rPr sz="1700">
+                <a:latin typeface="Courier New"/>
+              </a:rPr>
+              <a:t>Func&lt;string, string, bool&gt; contains = (text, word) =&gt; text.</a:t>
+            </a:r>
+            <a:r>
+              <a:rPr sz="1700">
+                <a:solidFill>
+                  <a:srgbClr val="00B0F0"/>
+                </a:solidFill>
+                <a:latin typeface="Courier New"/>
+              </a:rPr>
+              <a:t>Contains</a:t>
+            </a:r>
+            <a:r>
+              <a:rPr sz="1700">
+                <a:latin typeface="Courier New"/>
+              </a:rPr>
+              <a:t>(word);</a:t>
+            </a:r>
+          </a:p>
+          <a:p>
+            <a:r>
+              <a:rPr sz="1700">
+                <a:latin typeface="Courier New"/>
+              </a:rPr>
+              <a:t>Console.</a:t>
+            </a:r>
+            <a:r>
+              <a:rPr sz="1700">
+                <a:solidFill>
+                  <a:srgbClr val="00B0F0"/>
+                </a:solidFill>
+                <a:latin typeface="Courier New"/>
+              </a:rPr>
+              <a:t>WriteLine</a:t>
+            </a:r>
+            <a:r>
+              <a:rPr sz="1700">
+                <a:latin typeface="Courier New"/>
+              </a:rPr>
+              <a:t>(contains("hello world", "world")); </a:t>
+            </a:r>
+            <a:r>
+              <a:rPr sz="1700">
+                <a:solidFill>
+                  <a:srgbClr val="008000"/>
+                </a:solidFill>
+                <a:latin typeface="Courier New"/>
+              </a:rPr>
+              <a:t>// True</a:t>
+            </a:r>
+          </a:p>
+        </p:txBody>
+      </p:sp>
+    </p:spTree>
+  </p:cSld>
+  <p:clrMapOvr>
+    <a:masterClrMapping/>
+  </p:clrMapOvr>
+</p:sld>
+</file>
+
+<file path=ppt/slides/slide23.xml><?xml version="1.0" encoding="utf-8"?>
+<p:sld xmlns:a="http://schemas.openxmlformats.org/drawingml/2006/main" xmlns:p="http://schemas.openxmlformats.org/presentationml/2006/main" xmlns:r="http://schemas.openxmlformats.org/officeDocument/2006/relationships">
+  <p:cSld>
+    <p:bg>
+      <p:bgPr>
+        <a:solidFill>
+          <a:srgbClr val="FFFFFF"/>
+        </a:solidFill>
+        <a:effectLst/>
+      </p:bgPr>
+    </p:bg>
+    <p:spTree>
+      <p:nvGrpSpPr>
+        <p:cNvPr id="1" name=""/>
+        <p:cNvGrpSpPr/>
+        <p:nvPr/>
+      </p:nvGrpSpPr>
+      <p:grpSpPr/>
+      <p:sp>
+        <p:nvSpPr>
+          <p:cNvPr id="2" name="TextBox 1"/>
+          <p:cNvSpPr txBox="1"/>
+          <p:nvPr/>
+        </p:nvSpPr>
+        <p:spPr>
+          <a:xfrm>
+            <a:off x="457200" y="274320"/>
+            <a:ext cx="11274552" cy="777240"/>
+          </a:xfrm>
+          <a:prstGeom prst="rect">
+            <a:avLst/>
+          </a:prstGeom>
+          <a:solidFill>
+            <a:srgbClr val="1F497D"/>
+          </a:solidFill>
+        </p:spPr>
+        <p:txBody>
+          <a:bodyPr wrap="square">
+            <a:spAutoFit/>
+          </a:bodyPr>
+          <a:lstStyle/>
+          <a:p>
+            <a:r>
+              <a:rPr sz="3400" b="1">
+                <a:solidFill>
+                  <a:srgbClr val="FFFFFF"/>
+                </a:solidFill>
+              </a:rPr>
+              <a:t>Predicate&lt;T&gt; — Булеви функции</a:t>
+            </a:r>
+          </a:p>
+        </p:txBody>
+      </p:sp>
+      <p:sp>
+        <p:nvSpPr>
+          <p:cNvPr id="3" name="TextBox 2"/>
+          <p:cNvSpPr txBox="1"/>
+          <p:nvPr/>
+        </p:nvSpPr>
+        <p:spPr>
+          <a:xfrm>
+            <a:off x="457200" y="1170432"/>
+            <a:ext cx="11274552" cy="594360"/>
+          </a:xfrm>
+          <a:prstGeom prst="rect">
+            <a:avLst/>
+          </a:prstGeom>
+          <a:noFill/>
+        </p:spPr>
+        <p:txBody>
+          <a:bodyPr wrap="square">
+            <a:spAutoFit/>
+          </a:bodyPr>
+          <a:lstStyle/>
+          <a:p>
+            <a:r>
+              <a:rPr sz="1900">
+                <a:solidFill>
+                  <a:srgbClr val="1F1F1F"/>
+                </a:solidFill>
+              </a:rPr>
+              <a:t>Predicate&lt;T&gt; е съкратен запис на Func&lt;T, bool&gt;. Специализиран делегат за проверки — използва се с List&lt;T&gt; методи.</a:t>
+            </a:r>
+          </a:p>
+        </p:txBody>
+      </p:sp>
+      <p:sp>
+        <p:nvSpPr>
+          <p:cNvPr id="4" name="TextBox 3"/>
+          <p:cNvSpPr txBox="1"/>
+          <p:nvPr/>
+        </p:nvSpPr>
+        <p:spPr>
+          <a:xfrm>
+            <a:off x="457200" y="1828800"/>
+            <a:ext cx="11274552" cy="4297680"/>
+          </a:xfrm>
+          <a:prstGeom prst="rect">
+            <a:avLst/>
+          </a:prstGeom>
+          <a:solidFill>
+            <a:srgbClr val="F0F0F0"/>
+          </a:solidFill>
+        </p:spPr>
+        <p:txBody>
+          <a:bodyPr wrap="none">
+            <a:spAutoFit/>
+          </a:bodyPr>
+          <a:lstStyle/>
+          <a:p>
+            <a:r>
+              <a:rPr sz="1700">
+                <a:solidFill>
+                  <a:srgbClr val="008000"/>
+                </a:solidFill>
+                <a:latin typeface="Courier New"/>
+              </a:rPr>
+              <a:t>// Predicate&lt;T&gt; е идентично на Func&lt;T, bool&gt;</a:t>
+            </a:r>
+          </a:p>
+          <a:p>
+            <a:r>
+              <a:rPr sz="1700">
+                <a:latin typeface="Courier New"/>
+              </a:rPr>
+              <a:t>Predicate&lt;int&gt;    isEven  = x =&gt; x % 2 == 0;</a:t>
+            </a:r>
+          </a:p>
+          <a:p>
+            <a:r>
+              <a:rPr sz="1700">
+                <a:latin typeface="Courier New"/>
+              </a:rPr>
+              <a:t>Predicate&lt;string&gt; isShort = s =&gt; s.</a:t>
+            </a:r>
+            <a:r>
+              <a:rPr sz="1700">
+                <a:solidFill>
+                  <a:srgbClr val="00B0F0"/>
+                </a:solidFill>
+                <a:latin typeface="Courier New"/>
+              </a:rPr>
+              <a:t>Length</a:t>
+            </a:r>
+            <a:r>
+              <a:rPr sz="1700">
+                <a:latin typeface="Courier New"/>
+              </a:rPr>
+              <a:t> &lt; 5;</a:t>
+            </a:r>
+          </a:p>
+          <a:p>
+            <a:r>
+              <a:rPr sz="1700">
+                <a:latin typeface="Courier New"/>
+              </a:rPr>
+              <a:t/>
+            </a:r>
+          </a:p>
+          <a:p>
+            <a:r>
+              <a:rPr sz="1700">
+                <a:latin typeface="Courier New"/>
+              </a:rPr>
+              <a:t>List&lt;int&gt; nums = new List&lt;int&gt; { 1, 2, 3, 4, 5, 6, 7, 8 };</a:t>
+            </a:r>
+          </a:p>
+          <a:p>
+            <a:r>
+              <a:rPr sz="1700">
+                <a:latin typeface="Courier New"/>
+              </a:rPr>
+              <a:t/>
+            </a:r>
+          </a:p>
+          <a:p>
+            <a:r>
+              <a:rPr sz="1700">
+                <a:solidFill>
+                  <a:srgbClr val="008000"/>
+                </a:solidFill>
+                <a:latin typeface="Courier New"/>
+              </a:rPr>
+              <a:t>// Find — първият съвпадащ елемент</a:t>
+            </a:r>
+          </a:p>
+          <a:p>
+            <a:r>
+              <a:rPr sz="1700">
+                <a:latin typeface="Courier New"/>
+              </a:rPr>
+              <a:t>int first = nums.</a:t>
+            </a:r>
+            <a:r>
+              <a:rPr sz="1700">
+                <a:solidFill>
+                  <a:srgbClr val="00B0F0"/>
+                </a:solidFill>
+                <a:latin typeface="Courier New"/>
+              </a:rPr>
+              <a:t>Find</a:t>
+            </a:r>
+            <a:r>
+              <a:rPr sz="1700">
+                <a:latin typeface="Courier New"/>
+              </a:rPr>
+              <a:t>(isEven);</a:t>
+            </a:r>
+            <a:r>
+              <a:rPr sz="1700">
+                <a:solidFill>
+                  <a:srgbClr val="008000"/>
+                </a:solidFill>
+                <a:latin typeface="Courier New"/>
+              </a:rPr>
+              <a:t>                     // 2</a:t>
+            </a:r>
+          </a:p>
+          <a:p>
+            <a:r>
+              <a:rPr sz="1700">
+                <a:latin typeface="Courier New"/>
+              </a:rPr>
+              <a:t/>
+            </a:r>
+          </a:p>
+          <a:p>
+            <a:r>
+              <a:rPr sz="1700">
+                <a:solidFill>
+                  <a:srgbClr val="008000"/>
+                </a:solidFill>
+                <a:latin typeface="Courier New"/>
+              </a:rPr>
+              <a:t>// FindAll — всички съвпадащи</a:t>
+            </a:r>
+          </a:p>
+          <a:p>
+            <a:r>
+              <a:rPr sz="1700">
+                <a:latin typeface="Courier New"/>
+              </a:rPr>
+              <a:t>List&lt;int&gt; evens = nums.</a:t>
+            </a:r>
+            <a:r>
+              <a:rPr sz="1700">
+                <a:solidFill>
+                  <a:srgbClr val="00B0F0"/>
+                </a:solidFill>
+                <a:latin typeface="Courier New"/>
+              </a:rPr>
+              <a:t>FindAll</a:t>
+            </a:r>
+            <a:r>
+              <a:rPr sz="1700">
+                <a:latin typeface="Courier New"/>
+              </a:rPr>
+              <a:t>(isEven);</a:t>
+            </a:r>
+            <a:r>
+              <a:rPr sz="1700">
+                <a:solidFill>
+                  <a:srgbClr val="008000"/>
+                </a:solidFill>
+                <a:latin typeface="Courier New"/>
+              </a:rPr>
+              <a:t>              // [2,4,6,8]</a:t>
+            </a:r>
+          </a:p>
+          <a:p>
+            <a:r>
+              <a:rPr sz="1700">
+                <a:latin typeface="Courier New"/>
+              </a:rPr>
+              <a:t/>
+            </a:r>
+          </a:p>
+          <a:p>
+            <a:r>
+              <a:rPr sz="1700">
+                <a:solidFill>
+                  <a:srgbClr val="008000"/>
+                </a:solidFill>
+                <a:latin typeface="Courier New"/>
+              </a:rPr>
+              <a:t>// RemoveAll — премахни съвпадащите, върни брой</a:t>
+            </a:r>
+          </a:p>
+          <a:p>
+            <a:r>
+              <a:rPr sz="1700">
+                <a:latin typeface="Courier New"/>
+              </a:rPr>
+              <a:t>int removed = nums.</a:t>
+            </a:r>
+            <a:r>
+              <a:rPr sz="1700">
+                <a:solidFill>
+                  <a:srgbClr val="00B0F0"/>
+                </a:solidFill>
+                <a:latin typeface="Courier New"/>
+              </a:rPr>
+              <a:t>RemoveAll</a:t>
+            </a:r>
+            <a:r>
+              <a:rPr sz="1700">
+                <a:latin typeface="Courier New"/>
+              </a:rPr>
+              <a:t>(x =&gt; x &gt; 5);</a:t>
+            </a:r>
+            <a:r>
+              <a:rPr sz="1700">
+                <a:solidFill>
+                  <a:srgbClr val="008000"/>
+                </a:solidFill>
+                <a:latin typeface="Courier New"/>
+              </a:rPr>
+              <a:t>      // 3 (6,7,8)</a:t>
+            </a:r>
+          </a:p>
+          <a:p>
+            <a:r>
+              <a:rPr sz="1700">
+                <a:latin typeface="Courier New"/>
+              </a:rPr>
+              <a:t/>
+            </a:r>
+          </a:p>
+          <a:p>
+            <a:r>
+              <a:rPr sz="1700">
+                <a:solidFill>
+                  <a:srgbClr val="008000"/>
+                </a:solidFill>
+                <a:latin typeface="Courier New"/>
+              </a:rPr>
+              <a:t>// Predicate и Func&lt;T,bool&gt; са взаимозаменяеми:</a:t>
+            </a:r>
+          </a:p>
+          <a:p>
+            <a:r>
+              <a:rPr sz="1700">
+                <a:latin typeface="Courier New"/>
+              </a:rPr>
+              <a:t>Func&lt;int, bool&gt; f = isEven;</a:t>
+            </a:r>
+            <a:r>
+              <a:rPr sz="1700">
+                <a:solidFill>
+                  <a:srgbClr val="008000"/>
+                </a:solidFill>
+                <a:latin typeface="Courier New"/>
+              </a:rPr>
+              <a:t>   // OK — конвертиране</a:t>
+            </a:r>
+          </a:p>
+        </p:txBody>
+      </p:sp>
+    </p:spTree>
+  </p:cSld>
+  <p:clrMapOvr>
+    <a:masterClrMapping/>
+  </p:clrMapOvr>
+</p:sld>
+</file>
+
+<file path=ppt/slides/slide24.xml><?xml version="1.0" encoding="utf-8"?>
+<p:sld xmlns:a="http://schemas.openxmlformats.org/drawingml/2006/main" xmlns:p="http://schemas.openxmlformats.org/presentationml/2006/main" xmlns:r="http://schemas.openxmlformats.org/officeDocument/2006/relationships">
+  <p:cSld>
+    <p:bg>
+      <p:bgPr>
+        <a:solidFill>
+          <a:srgbClr val="FFFFFF"/>
+        </a:solidFill>
+        <a:effectLst/>
+      </p:bgPr>
+    </p:bg>
+    <p:spTree>
+      <p:nvGrpSpPr>
+        <p:cNvPr id="1" name=""/>
+        <p:cNvGrpSpPr/>
+        <p:nvPr/>
+      </p:nvGrpSpPr>
+      <p:grpSpPr/>
+      <p:sp>
+        <p:nvSpPr>
+          <p:cNvPr id="2" name="TextBox 1"/>
+          <p:cNvSpPr txBox="1"/>
+          <p:nvPr/>
+        </p:nvSpPr>
+        <p:spPr>
+          <a:xfrm>
+            <a:off x="457200" y="274320"/>
+            <a:ext cx="11274552" cy="777240"/>
+          </a:xfrm>
+          <a:prstGeom prst="rect">
+            <a:avLst/>
+          </a:prstGeom>
+          <a:solidFill>
+            <a:srgbClr val="1F497D"/>
+          </a:solidFill>
+        </p:spPr>
+        <p:txBody>
+          <a:bodyPr wrap="square">
+            <a:spAutoFit/>
+          </a:bodyPr>
+          <a:lstStyle/>
+          <a:p>
+            <a:r>
+              <a:rPr sz="3400" b="1">
+                <a:solidFill>
+                  <a:srgbClr val="FFFFFF"/>
+                </a:solidFill>
+              </a:rPr>
+              <a:t>Комбиниране на делегати (Multicast)</a:t>
+            </a:r>
+          </a:p>
+        </p:txBody>
+      </p:sp>
+      <p:sp>
+        <p:nvSpPr>
+          <p:cNvPr id="3" name="TextBox 2"/>
+          <p:cNvSpPr txBox="1"/>
+          <p:nvPr/>
+        </p:nvSpPr>
+        <p:spPr>
+          <a:xfrm>
+            <a:off x="457200" y="1170432"/>
+            <a:ext cx="11274552" cy="594360"/>
+          </a:xfrm>
+          <a:prstGeom prst="rect">
+            <a:avLst/>
+          </a:prstGeom>
+          <a:noFill/>
+        </p:spPr>
+        <p:txBody>
+          <a:bodyPr wrap="square">
+            <a:spAutoFit/>
+          </a:bodyPr>
+          <a:lstStyle/>
+          <a:p>
+            <a:r>
+              <a:rPr sz="1900">
+                <a:solidFill>
+                  <a:srgbClr val="1F1F1F"/>
+                </a:solidFill>
+              </a:rPr>
+              <a:t>Делегатите могат да се комбинират с + и +=. При извикване се изпълняват ВСИЧКИ в реда на добавяне — основата на Events.</a:t>
+            </a:r>
+          </a:p>
+        </p:txBody>
+      </p:sp>
+      <p:sp>
+        <p:nvSpPr>
+          <p:cNvPr id="4" name="TextBox 3"/>
+          <p:cNvSpPr txBox="1"/>
+          <p:nvPr/>
+        </p:nvSpPr>
+        <p:spPr>
+          <a:xfrm>
+            <a:off x="457200" y="1828800"/>
+            <a:ext cx="11274552" cy="4297680"/>
+          </a:xfrm>
+          <a:prstGeom prst="rect">
+            <a:avLst/>
+          </a:prstGeom>
+          <a:solidFill>
+            <a:srgbClr val="F0F0F0"/>
+          </a:solidFill>
+        </p:spPr>
+        <p:txBody>
+          <a:bodyPr wrap="none">
+            <a:spAutoFit/>
+          </a:bodyPr>
+          <a:lstStyle/>
+          <a:p>
+            <a:r>
+              <a:rPr sz="1700">
+                <a:latin typeface="Courier New"/>
+              </a:rPr>
+              <a:t>Action&lt;string&gt; log    = msg =&gt; Console.</a:t>
+            </a:r>
+            <a:r>
+              <a:rPr sz="1700">
+                <a:solidFill>
+                  <a:srgbClr val="00B0F0"/>
+                </a:solidFill>
+                <a:latin typeface="Courier New"/>
+              </a:rPr>
+              <a:t>WriteLine</a:t>
+            </a:r>
+            <a:r>
+              <a:rPr sz="1700">
+                <a:latin typeface="Courier New"/>
+              </a:rPr>
+              <a:t>($"[LOG]  {msg}");</a:t>
+            </a:r>
+          </a:p>
+          <a:p>
+            <a:r>
+              <a:rPr sz="1700">
+                <a:latin typeface="Courier New"/>
+              </a:rPr>
+              <a:t>Action&lt;string&gt; notify = msg =&gt; Console.</a:t>
+            </a:r>
+            <a:r>
+              <a:rPr sz="1700">
+                <a:solidFill>
+                  <a:srgbClr val="00B0F0"/>
+                </a:solidFill>
+                <a:latin typeface="Courier New"/>
+              </a:rPr>
+              <a:t>WriteLine</a:t>
+            </a:r>
+            <a:r>
+              <a:rPr sz="1700">
+                <a:latin typeface="Courier New"/>
+              </a:rPr>
+              <a:t>($"[MAIL] {msg}");</a:t>
+            </a:r>
+          </a:p>
+          <a:p>
+            <a:r>
+              <a:rPr sz="1700">
+                <a:latin typeface="Courier New"/>
+              </a:rPr>
+              <a:t>Action&lt;string&gt; audit  = msg =&gt; Console.</a:t>
+            </a:r>
+            <a:r>
+              <a:rPr sz="1700">
+                <a:solidFill>
+                  <a:srgbClr val="00B0F0"/>
+                </a:solidFill>
+                <a:latin typeface="Courier New"/>
+              </a:rPr>
+              <a:t>WriteLine</a:t>
+            </a:r>
+            <a:r>
+              <a:rPr sz="1700">
+                <a:latin typeface="Courier New"/>
+              </a:rPr>
+              <a:t>($"[AUDIT]{msg}");</a:t>
+            </a:r>
+          </a:p>
+          <a:p>
+            <a:r>
+              <a:rPr sz="1700">
+                <a:latin typeface="Courier New"/>
+              </a:rPr>
+              <a:t/>
+            </a:r>
+          </a:p>
+          <a:p>
+            <a:r>
+              <a:rPr sz="1700">
+                <a:solidFill>
+                  <a:srgbClr val="008000"/>
+                </a:solidFill>
+                <a:latin typeface="Courier New"/>
+              </a:rPr>
+              <a:t>// Комбинираме трите в един делегат:</a:t>
+            </a:r>
+          </a:p>
+          <a:p>
+            <a:r>
+              <a:rPr sz="1700">
+                <a:latin typeface="Courier New"/>
+              </a:rPr>
+              <a:t>Action&lt;string&gt; pipeline = log + notify;</a:t>
+            </a:r>
+          </a:p>
+          <a:p>
+            <a:r>
+              <a:rPr sz="1700">
+                <a:latin typeface="Courier New"/>
+              </a:rPr>
+              <a:t>pipeline += audit;</a:t>
+            </a:r>
+            <a:r>
+              <a:rPr sz="1700">
+                <a:solidFill>
+                  <a:srgbClr val="008000"/>
+                </a:solidFill>
+                <a:latin typeface="Courier New"/>
+              </a:rPr>
+              <a:t>                   // добавяме трети</a:t>
+            </a:r>
+          </a:p>
+          <a:p>
+            <a:r>
+              <a:rPr sz="1700">
+                <a:latin typeface="Courier New"/>
+              </a:rPr>
+              <a:t/>
+            </a:r>
+          </a:p>
+          <a:p>
+            <a:r>
+              <a:rPr sz="1700">
+                <a:latin typeface="Courier New"/>
+              </a:rPr>
+              <a:t>pipeline("Грешка в базата данни!");</a:t>
+            </a:r>
+          </a:p>
+          <a:p>
+            <a:r>
+              <a:rPr sz="1700">
+                <a:solidFill>
+                  <a:srgbClr val="008000"/>
+                </a:solidFill>
+                <a:latin typeface="Courier New"/>
+              </a:rPr>
+              <a:t>// Изход:</a:t>
+            </a:r>
+          </a:p>
+          <a:p>
+            <a:r>
+              <a:rPr sz="1700">
+                <a:solidFill>
+                  <a:srgbClr val="008000"/>
+                </a:solidFill>
+                <a:latin typeface="Courier New"/>
+              </a:rPr>
+              <a:t>// [LOG]   Грешка в базата данни!</a:t>
+            </a:r>
+          </a:p>
+          <a:p>
+            <a:r>
+              <a:rPr sz="1700">
+                <a:solidFill>
+                  <a:srgbClr val="008000"/>
+                </a:solidFill>
+                <a:latin typeface="Courier New"/>
+              </a:rPr>
+              <a:t>// [MAIL]  Грешка в базата данни!</a:t>
+            </a:r>
+          </a:p>
+          <a:p>
+            <a:r>
+              <a:rPr sz="1700">
+                <a:solidFill>
+                  <a:srgbClr val="008000"/>
+                </a:solidFill>
+                <a:latin typeface="Courier New"/>
+              </a:rPr>
+              <a:t>// [AUDIT] Грешка в базата данни!</a:t>
+            </a:r>
+          </a:p>
+          <a:p>
+            <a:r>
+              <a:rPr sz="1700">
+                <a:latin typeface="Courier New"/>
+              </a:rPr>
+              <a:t/>
+            </a:r>
+          </a:p>
+          <a:p>
+            <a:r>
+              <a:rPr sz="1700">
+                <a:solidFill>
+                  <a:srgbClr val="008000"/>
+                </a:solidFill>
+                <a:latin typeface="Courier New"/>
+              </a:rPr>
+              <a:t>// Премахване с -=:</a:t>
+            </a:r>
+          </a:p>
+          <a:p>
+            <a:r>
+              <a:rPr sz="1700">
+                <a:latin typeface="Courier New"/>
+              </a:rPr>
+              <a:t>pipeline -= notify;</a:t>
+            </a:r>
+            <a:r>
+              <a:rPr sz="1700">
+                <a:solidFill>
+                  <a:srgbClr val="008000"/>
+                </a:solidFill>
+                <a:latin typeface="Courier New"/>
+              </a:rPr>
+              <a:t>               // само log и audit</a:t>
+            </a:r>
+          </a:p>
+          <a:p>
+            <a:r>
+              <a:rPr sz="1700">
+                <a:latin typeface="Courier New"/>
+              </a:rPr>
+              <a:t>pipeline("Системата стартира.");</a:t>
+            </a:r>
+          </a:p>
+        </p:txBody>
+      </p:sp>
+    </p:spTree>
+  </p:cSld>
+  <p:clrMapOvr>
+    <a:masterClrMapping/>
+  </p:clrMapOvr>
+</p:sld>
+</file>
+
+<file path=ppt/slides/slide25.xml><?xml version="1.0" encoding="utf-8"?>
+<p:sld xmlns:a="http://schemas.openxmlformats.org/drawingml/2006/main" xmlns:p="http://schemas.openxmlformats.org/presentationml/2006/main" xmlns:r="http://schemas.openxmlformats.org/officeDocument/2006/relationships">
+  <p:cSld>
+    <p:bg>
+      <p:bgPr>
+        <a:solidFill>
+          <a:srgbClr val="FFFFFF"/>
+        </a:solidFill>
+        <a:effectLst/>
+      </p:bgPr>
+    </p:bg>
+    <p:spTree>
+      <p:nvGrpSpPr>
+        <p:cNvPr id="1" name=""/>
+        <p:cNvGrpSpPr/>
+        <p:nvPr/>
+      </p:nvGrpSpPr>
+      <p:grpSpPr/>
+      <p:sp>
+        <p:nvSpPr>
+          <p:cNvPr id="2" name="TextBox 1"/>
+          <p:cNvSpPr txBox="1"/>
+          <p:nvPr/>
+        </p:nvSpPr>
+        <p:spPr>
+          <a:xfrm>
+            <a:off x="457200" y="274320"/>
+            <a:ext cx="11274552" cy="777240"/>
+          </a:xfrm>
+          <a:prstGeom prst="rect">
+            <a:avLst/>
+          </a:prstGeom>
+          <a:solidFill>
+            <a:srgbClr val="1F497D"/>
+          </a:solidFill>
+        </p:spPr>
+        <p:txBody>
+          <a:bodyPr wrap="square">
+            <a:spAutoFit/>
+          </a:bodyPr>
+          <a:lstStyle/>
+          <a:p>
+            <a:r>
+              <a:rPr sz="3400" b="1">
+                <a:solidFill>
+                  <a:srgbClr val="FFFFFF"/>
+                </a:solidFill>
+              </a:rPr>
+              <a:t>Еволюция: именован метод → анонимен → ламбда</a:t>
+            </a:r>
+          </a:p>
+        </p:txBody>
+      </p:sp>
+      <p:sp>
+        <p:nvSpPr>
+          <p:cNvPr id="3" name="TextBox 2"/>
+          <p:cNvSpPr txBox="1"/>
+          <p:nvPr/>
+        </p:nvSpPr>
+        <p:spPr>
+          <a:xfrm>
+            <a:off x="457200" y="1170432"/>
+            <a:ext cx="11274552" cy="594360"/>
+          </a:xfrm>
+          <a:prstGeom prst="rect">
+            <a:avLst/>
+          </a:prstGeom>
+          <a:noFill/>
+        </p:spPr>
+        <p:txBody>
+          <a:bodyPr wrap="square">
+            <a:spAutoFit/>
+          </a:bodyPr>
+          <a:lstStyle/>
+          <a:p>
+            <a:r>
+              <a:rPr sz="1900">
+                <a:solidFill>
+                  <a:srgbClr val="1F1F1F"/>
+                </a:solidFill>
+              </a:rPr>
+              <a:t>Три начина за предаване на код в C# — всеки по-кратък и изразителен от предишния.</a:t>
+            </a:r>
+          </a:p>
+        </p:txBody>
+      </p:sp>
+      <p:sp>
+        <p:nvSpPr>
+          <p:cNvPr id="4" name="TextBox 3"/>
+          <p:cNvSpPr txBox="1"/>
+          <p:nvPr/>
+        </p:nvSpPr>
+        <p:spPr>
+          <a:xfrm>
+            <a:off x="457200" y="1783080"/>
+            <a:ext cx="11274552" cy="4572000"/>
+          </a:xfrm>
+          <a:prstGeom prst="rect">
+            <a:avLst/>
+          </a:prstGeom>
+          <a:solidFill>
+            <a:srgbClr val="F0F0F0"/>
+          </a:solidFill>
+        </p:spPr>
+        <p:txBody>
+          <a:bodyPr wrap="none">
+            <a:spAutoFit/>
+          </a:bodyPr>
+          <a:lstStyle/>
+          <a:p>
+            <a:r>
+              <a:rPr sz="1600">
+                <a:latin typeface="Courier New"/>
+              </a:rPr>
+              <a:t>int[] nums = { 5, 2, 8, 1, 9, 3 };</a:t>
+            </a:r>
+          </a:p>
+          <a:p>
+            <a:r>
+              <a:rPr sz="1600">
+                <a:latin typeface="Courier New"/>
+              </a:rPr>
+              <a:t/>
+            </a:r>
+          </a:p>
+          <a:p>
+            <a:r>
+              <a:rPr sz="1600">
+                <a:solidFill>
+                  <a:srgbClr val="008000"/>
+                </a:solidFill>
+                <a:latin typeface="Courier New"/>
+              </a:rPr>
+              <a:t>// 1. Именован метод (C# 1.0) — отделна дефиниция</a:t>
+            </a:r>
+          </a:p>
+          <a:p>
+            <a:r>
+              <a:rPr sz="1600">
+                <a:latin typeface="Courier New"/>
+              </a:rPr>
+              <a:t>static bool IsEven(int x) { return x % 2 == 0; }</a:t>
+            </a:r>
+          </a:p>
+          <a:p>
+            <a:r>
+              <a:rPr sz="1600">
+                <a:latin typeface="Courier New"/>
+              </a:rPr>
+              <a:t>var v1 = nums.</a:t>
+            </a:r>
+            <a:r>
+              <a:rPr sz="1600">
+                <a:solidFill>
+                  <a:srgbClr val="00B0F0"/>
+                </a:solidFill>
+                <a:latin typeface="Courier New"/>
+              </a:rPr>
+              <a:t>Where</a:t>
+            </a:r>
+            <a:r>
+              <a:rPr sz="1600">
+                <a:latin typeface="Courier New"/>
+              </a:rPr>
+              <a:t>(IsEven);</a:t>
+            </a:r>
+            <a:r>
+              <a:rPr sz="1600">
+                <a:solidFill>
+                  <a:srgbClr val="008000"/>
+                </a:solidFill>
+                <a:latin typeface="Courier New"/>
+              </a:rPr>
+              <a:t>                  // метод-група</a:t>
+            </a:r>
+          </a:p>
+          <a:p>
+            <a:r>
+              <a:rPr sz="1600">
+                <a:latin typeface="Courier New"/>
+              </a:rPr>
+              <a:t/>
+            </a:r>
+          </a:p>
+          <a:p>
+            <a:r>
+              <a:rPr sz="1600">
+                <a:solidFill>
+                  <a:srgbClr val="008000"/>
+                </a:solidFill>
+                <a:latin typeface="Courier New"/>
+              </a:rPr>
+              <a:t>// 2. Анонимен метод (C# 2.0) — без отделна дефиниция</a:t>
+            </a:r>
+          </a:p>
+          <a:p>
+            <a:r>
+              <a:rPr sz="1600">
+                <a:latin typeface="Courier New"/>
+              </a:rPr>
+              <a:t>var v2 = nums.</a:t>
+            </a:r>
+            <a:r>
+              <a:rPr sz="1600">
+                <a:solidFill>
+                  <a:srgbClr val="00B0F0"/>
+                </a:solidFill>
+                <a:latin typeface="Courier New"/>
+              </a:rPr>
+              <a:t>Where</a:t>
+            </a:r>
+            <a:r>
+              <a:rPr sz="1600">
+                <a:latin typeface="Courier New"/>
+              </a:rPr>
+              <a:t>(delegate(int x) { return x % 2 == 0; });</a:t>
+            </a:r>
+          </a:p>
+          <a:p>
+            <a:r>
+              <a:rPr sz="1600">
+                <a:latin typeface="Courier New"/>
+              </a:rPr>
+              <a:t/>
+            </a:r>
+          </a:p>
+          <a:p>
+            <a:r>
+              <a:rPr sz="1600">
+                <a:solidFill>
+                  <a:srgbClr val="008000"/>
+                </a:solidFill>
+                <a:latin typeface="Courier New"/>
+              </a:rPr>
+              <a:t>// 3. Ламбда израз (C# 3.0) — препоръчан стил днес</a:t>
+            </a:r>
+          </a:p>
+          <a:p>
+            <a:r>
+              <a:rPr sz="1600">
+                <a:latin typeface="Courier New"/>
+              </a:rPr>
+              <a:t>var v3 = nums.</a:t>
+            </a:r>
+            <a:r>
+              <a:rPr sz="1600">
+                <a:solidFill>
+                  <a:srgbClr val="00B0F0"/>
+                </a:solidFill>
+                <a:latin typeface="Courier New"/>
+              </a:rPr>
+              <a:t>Where</a:t>
+            </a:r>
+            <a:r>
+              <a:rPr sz="1600">
+                <a:latin typeface="Courier New"/>
+              </a:rPr>
+              <a:t>(x =&gt; x % 2 == 0);</a:t>
+            </a:r>
+          </a:p>
+          <a:p>
+            <a:r>
+              <a:rPr sz="1600">
+                <a:latin typeface="Courier New"/>
+              </a:rPr>
+              <a:t/>
+            </a:r>
+          </a:p>
+          <a:p>
+            <a:r>
+              <a:rPr sz="1600">
+                <a:solidFill>
+                  <a:srgbClr val="008000"/>
+                </a:solidFill>
+                <a:latin typeface="Courier New"/>
+              </a:rPr>
+              <a:t>// Всички дават един и същ резултат:</a:t>
+            </a:r>
+          </a:p>
+          <a:p>
+            <a:r>
+              <a:rPr sz="1600">
+                <a:solidFill>
+                  <a:srgbClr val="008000"/>
+                </a:solidFill>
+                <a:latin typeface="Courier New"/>
+              </a:rPr>
+              <a:t>// v1 == v2 == v3 == { 2, 8 }</a:t>
+            </a:r>
+          </a:p>
+          <a:p>
+            <a:r>
+              <a:rPr sz="1600">
+                <a:latin typeface="Courier New"/>
+              </a:rPr>
+              <a:t/>
+            </a:r>
+          </a:p>
+          <a:p>
+            <a:r>
+              <a:rPr sz="1600">
+                <a:solidFill>
+                  <a:srgbClr val="008000"/>
+                </a:solidFill>
+                <a:latin typeface="Courier New"/>
+              </a:rPr>
+              <a:t>// Ламбда с блок (когато логиката е по-сложна):</a:t>
+            </a:r>
+          </a:p>
+          <a:p>
+            <a:r>
+              <a:rPr sz="1600">
+                <a:latin typeface="Courier New"/>
+              </a:rPr>
+              <a:t>var v4 = nums.</a:t>
+            </a:r>
+            <a:r>
+              <a:rPr sz="1600">
+                <a:solidFill>
+                  <a:srgbClr val="00B0F0"/>
+                </a:solidFill>
+                <a:latin typeface="Courier New"/>
+              </a:rPr>
+              <a:t>Where</a:t>
+            </a:r>
+            <a:r>
+              <a:rPr sz="1600">
+                <a:latin typeface="Courier New"/>
+              </a:rPr>
+              <a:t>(x =&gt; {</a:t>
+            </a:r>
+          </a:p>
+          <a:p>
+            <a:r>
+              <a:rPr sz="1600">
+                <a:latin typeface="Courier New"/>
+              </a:rPr>
+              <a:t>    bool isEven = x % 2 == 0;</a:t>
+            </a:r>
+          </a:p>
+          <a:p>
+            <a:r>
+              <a:rPr sz="1600">
+                <a:latin typeface="Courier New"/>
+              </a:rPr>
+              <a:t>    return isEven &amp;&amp; x &gt; 3;</a:t>
+            </a:r>
+          </a:p>
+          <a:p>
+            <a:r>
+              <a:rPr sz="1600">
+                <a:latin typeface="Courier New"/>
+              </a:rPr>
+              <a:t>}).</a:t>
+            </a:r>
+            <a:r>
+              <a:rPr sz="1600">
+                <a:solidFill>
+                  <a:srgbClr val="00B0F0"/>
+                </a:solidFill>
+                <a:latin typeface="Courier New"/>
+              </a:rPr>
+              <a:t>ToArray</a:t>
+            </a:r>
+            <a:r>
+              <a:rPr sz="1600">
+                <a:latin typeface="Courier New"/>
+              </a:rPr>
+              <a:t>();</a:t>
+            </a:r>
+            <a:r>
+              <a:rPr sz="1600">
+                <a:solidFill>
+                  <a:srgbClr val="008000"/>
+                </a:solidFill>
+                <a:latin typeface="Courier New"/>
+              </a:rPr>
+              <a:t>   // { 8 }</a:t>
+            </a:r>
+          </a:p>
+        </p:txBody>
+      </p:sp>
+    </p:spTree>
+  </p:cSld>
+  <p:clrMapOvr>
+    <a:masterClrMapping/>
+  </p:clrMapOvr>
+</p:sld>
+</file>
+
+<file path=ppt/slides/slide26.xml><?xml version="1.0" encoding="utf-8"?>
+<p:sld xmlns:a="http://schemas.openxmlformats.org/drawingml/2006/main" xmlns:p="http://schemas.openxmlformats.org/presentationml/2006/main" xmlns:r="http://schemas.openxmlformats.org/officeDocument/2006/relationships">
+  <p:cSld>
+    <p:bg>
+      <p:bgPr>
+        <a:solidFill>
+          <a:srgbClr val="FFFFFF"/>
+        </a:solidFill>
+        <a:effectLst/>
+      </p:bgPr>
+    </p:bg>
+    <p:spTree>
+      <p:nvGrpSpPr>
+        <p:cNvPr id="1" name=""/>
+        <p:cNvGrpSpPr/>
+        <p:nvPr/>
+      </p:nvGrpSpPr>
+      <p:grpSpPr/>
+      <p:sp>
+        <p:nvSpPr>
+          <p:cNvPr id="2" name="TextBox 1"/>
+          <p:cNvSpPr txBox="1"/>
+          <p:nvPr/>
+        </p:nvSpPr>
+        <p:spPr>
+          <a:xfrm>
+            <a:off x="457200" y="274320"/>
+            <a:ext cx="11274552" cy="777240"/>
+          </a:xfrm>
+          <a:prstGeom prst="rect">
+            <a:avLst/>
+          </a:prstGeom>
+          <a:solidFill>
+            <a:srgbClr val="1F497D"/>
+          </a:solidFill>
+        </p:spPr>
+        <p:txBody>
+          <a:bodyPr wrap="square">
+            <a:spAutoFit/>
+          </a:bodyPr>
+          <a:lstStyle/>
+          <a:p>
+            <a:r>
+              <a:rPr sz="3400" b="1">
+                <a:solidFill>
+                  <a:srgbClr val="FFFFFF"/>
+                </a:solidFill>
+              </a:rPr>
+              <a:t>Практически пример: Strategy Pattern</a:t>
+            </a:r>
+          </a:p>
+        </p:txBody>
+      </p:sp>
+      <p:sp>
+        <p:nvSpPr>
+          <p:cNvPr id="3" name="TextBox 2"/>
+          <p:cNvSpPr txBox="1"/>
+          <p:nvPr/>
+        </p:nvSpPr>
+        <p:spPr>
+          <a:xfrm>
+            <a:off x="457200" y="1170432"/>
+            <a:ext cx="11274552" cy="594360"/>
+          </a:xfrm>
+          <a:prstGeom prst="rect">
+            <a:avLst/>
+          </a:prstGeom>
+          <a:noFill/>
+        </p:spPr>
+        <p:txBody>
+          <a:bodyPr wrap="square">
+            <a:spAutoFit/>
+          </a:bodyPr>
+          <a:lstStyle/>
+          <a:p>
+            <a:r>
+              <a:rPr sz="1900">
+                <a:solidFill>
+                  <a:srgbClr val="1F1F1F"/>
+                </a:solidFill>
+              </a:rPr>
+              <a:t>Делегатите позволяват различно поведение на един метод без наследяване — Strategy Pattern.</a:t>
+            </a:r>
+          </a:p>
+        </p:txBody>
+      </p:sp>
+      <p:sp>
+        <p:nvSpPr>
+          <p:cNvPr id="4" name="TextBox 3"/>
+          <p:cNvSpPr txBox="1"/>
+          <p:nvPr/>
+        </p:nvSpPr>
+        <p:spPr>
+          <a:xfrm>
+            <a:off x="457200" y="1783080"/>
+            <a:ext cx="11274552" cy="4663440"/>
+          </a:xfrm>
+          <a:prstGeom prst="rect">
+            <a:avLst/>
+          </a:prstGeom>
+          <a:solidFill>
+            <a:srgbClr val="F0F0F0"/>
+          </a:solidFill>
+        </p:spPr>
+        <p:txBody>
+          <a:bodyPr wrap="none">
+            <a:spAutoFit/>
+          </a:bodyPr>
+          <a:lstStyle/>
+          <a:p>
+            <a:r>
+              <a:rPr sz="1600">
+                <a:solidFill>
+                  <a:srgbClr val="008000"/>
+                </a:solidFill>
+                <a:latin typeface="Courier New"/>
+              </a:rPr>
+              <a:t>// Стратегии за отстъпка — всяка е Func&lt;double, double&gt;</a:t>
+            </a:r>
+          </a:p>
+          <a:p>
+            <a:r>
+              <a:rPr sz="1600">
+                <a:latin typeface="Courier New"/>
+              </a:rPr>
+              <a:t>Func&lt;double, double&gt; noDiscount  = price =&gt; price;</a:t>
+            </a:r>
+          </a:p>
+          <a:p>
+            <a:r>
+              <a:rPr sz="1600">
+                <a:latin typeface="Courier New"/>
+              </a:rPr>
+              <a:t>Func&lt;double, double&gt; tenPercent  = price =&gt; price * 0.90;</a:t>
+            </a:r>
+          </a:p>
+          <a:p>
+            <a:r>
+              <a:rPr sz="1600">
+                <a:latin typeface="Courier New"/>
+              </a:rPr>
+              <a:t>Func&lt;double, double&gt; vipDiscount = price =&gt; price * 0.70;</a:t>
+            </a:r>
+          </a:p>
+          <a:p>
+            <a:r>
+              <a:rPr sz="1600">
+                <a:latin typeface="Courier New"/>
+              </a:rPr>
+              <a:t/>
+            </a:r>
+          </a:p>
+          <a:p>
+            <a:r>
+              <a:rPr sz="1600">
+                <a:solidFill>
+                  <a:srgbClr val="008000"/>
+                </a:solidFill>
+                <a:latin typeface="Courier New"/>
+              </a:rPr>
+              <a:t>// Един метод работи с ВСЯКА стратегия:</a:t>
+            </a:r>
+          </a:p>
+          <a:p>
+            <a:r>
+              <a:rPr sz="1600">
+                <a:latin typeface="Courier New"/>
+              </a:rPr>
+              <a:t>void Checkout(List&lt;double&gt; cart, </a:t>
+            </a:r>
+            <a:r>
+              <a:rPr sz="1600">
+                <a:solidFill>
+                  <a:srgbClr val="00B0F0"/>
+                </a:solidFill>
+                <a:latin typeface="Courier New"/>
+              </a:rPr>
+              <a:t>Func&lt;double, double&gt;</a:t>
+            </a:r>
+            <a:r>
+              <a:rPr sz="1600">
+                <a:latin typeface="Courier New"/>
+              </a:rPr>
+              <a:t> discount)</a:t>
+            </a:r>
+          </a:p>
+          <a:p>
+            <a:r>
+              <a:rPr sz="1600">
+                <a:latin typeface="Courier New"/>
+              </a:rPr>
+              <a:t>{</a:t>
+            </a:r>
+          </a:p>
+          <a:p>
+            <a:r>
+              <a:rPr sz="1600">
+                <a:latin typeface="Courier New"/>
+              </a:rPr>
+              <a:t>    double total = cart.</a:t>
+            </a:r>
+            <a:r>
+              <a:rPr sz="1600">
+                <a:solidFill>
+                  <a:srgbClr val="00B0F0"/>
+                </a:solidFill>
+                <a:latin typeface="Courier New"/>
+              </a:rPr>
+              <a:t>Sum</a:t>
+            </a:r>
+            <a:r>
+              <a:rPr sz="1600">
+                <a:latin typeface="Courier New"/>
+              </a:rPr>
+              <a:t>(discount);</a:t>
+            </a:r>
+          </a:p>
+          <a:p>
+            <a:r>
+              <a:rPr sz="1600">
+                <a:latin typeface="Courier New"/>
+              </a:rPr>
+              <a:t>    Console.</a:t>
+            </a:r>
+            <a:r>
+              <a:rPr sz="1600">
+                <a:solidFill>
+                  <a:srgbClr val="00B0F0"/>
+                </a:solidFill>
+                <a:latin typeface="Courier New"/>
+              </a:rPr>
+              <a:t>WriteLine</a:t>
+            </a:r>
+            <a:r>
+              <a:rPr sz="1600">
+                <a:latin typeface="Courier New"/>
+              </a:rPr>
+              <a:t>($"Обща сума: {total:F2} лв.");</a:t>
+            </a:r>
+          </a:p>
+          <a:p>
+            <a:r>
+              <a:rPr sz="1600">
+                <a:latin typeface="Courier New"/>
+              </a:rPr>
+              <a:t>}</a:t>
+            </a:r>
+          </a:p>
+          <a:p>
+            <a:r>
+              <a:rPr sz="1600">
+                <a:latin typeface="Courier New"/>
+              </a:rPr>
+              <a:t/>
+            </a:r>
+          </a:p>
+          <a:p>
+            <a:r>
+              <a:rPr sz="1600">
+                <a:latin typeface="Courier New"/>
+              </a:rPr>
+              <a:t>List&lt;double&gt; cart = new List&lt;double&gt; { 50.0, 30.0, 20.0 };</a:t>
+            </a:r>
+          </a:p>
+          <a:p>
+            <a:r>
+              <a:rPr sz="1600">
+                <a:latin typeface="Courier New"/>
+              </a:rPr>
+              <a:t/>
+            </a:r>
+          </a:p>
+          <a:p>
+            <a:r>
+              <a:rPr sz="1600">
+                <a:latin typeface="Courier New"/>
+              </a:rPr>
+              <a:t>Checkout(cart, noDiscount);   </a:t>
+            </a:r>
+            <a:r>
+              <a:rPr sz="1600">
+                <a:solidFill>
+                  <a:srgbClr val="008000"/>
+                </a:solidFill>
+                <a:latin typeface="Courier New"/>
+              </a:rPr>
+              <a:t>// 100.00 лв.</a:t>
+            </a:r>
+          </a:p>
+          <a:p>
+            <a:r>
+              <a:rPr sz="1600">
+                <a:latin typeface="Courier New"/>
+              </a:rPr>
+              <a:t>Checkout(cart, tenPercent);   </a:t>
+            </a:r>
+            <a:r>
+              <a:rPr sz="1600">
+                <a:solidFill>
+                  <a:srgbClr val="008000"/>
+                </a:solidFill>
+                <a:latin typeface="Courier New"/>
+              </a:rPr>
+              <a:t>// 90.00 лв.</a:t>
+            </a:r>
+          </a:p>
+          <a:p>
+            <a:r>
+              <a:rPr sz="1600">
+                <a:latin typeface="Courier New"/>
+              </a:rPr>
+              <a:t>Checkout(cart, vipDiscount);  </a:t>
+            </a:r>
+            <a:r>
+              <a:rPr sz="1600">
+                <a:solidFill>
+                  <a:srgbClr val="008000"/>
+                </a:solidFill>
+                <a:latin typeface="Courier New"/>
+              </a:rPr>
+              <a:t>// 70.00 лв.</a:t>
+            </a:r>
+          </a:p>
+        </p:txBody>
+      </p:sp>
+    </p:spTree>
+  </p:cSld>
+  <p:clrMapOvr>
+    <a:masterClrMapping/>
+  </p:clrMapOvr>
+</p:sld>
+</file>
+
 <file path=ppt/slides/slide3.xml><?xml version="1.0" encoding="utf-8"?>
 <p:sld xmlns:a="http://schemas.openxmlformats.org/drawingml/2006/main" xmlns:r="http://schemas.openxmlformats.org/officeDocument/2006/relationships" xmlns:p="http://schemas.openxmlformats.org/presentationml/2006/main">
   <p:cSld>
